--- a/Stockholm_Transport_Analytics.pptx
+++ b/Stockholm_Transport_Analytics.pptx
@@ -9,8 +9,8 @@
   </p:notesMasterIdLst>
   <p:sldIdLst>
     <p:sldId id="256" r:id="rId2"/>
-    <p:sldId id="319" r:id="rId3"/>
-    <p:sldId id="257" r:id="rId4"/>
+    <p:sldId id="257" r:id="rId3"/>
+    <p:sldId id="319" r:id="rId4"/>
     <p:sldId id="266" r:id="rId5"/>
     <p:sldId id="320" r:id="rId6"/>
     <p:sldId id="303" r:id="rId7"/>
@@ -8304,7 +8304,15 @@
 
 <file path=ppt/slides/slide2.xml><?xml version="1.0" encoding="utf-8"?>
 <p:sld xmlns:a="http://schemas.openxmlformats.org/drawingml/2006/main" xmlns:r="http://schemas.openxmlformats.org/officeDocument/2006/relationships" xmlns:p="http://schemas.openxmlformats.org/presentationml/2006/main">
-  <p:cSld>
+  <p:cSld name="Slide 2">
+    <p:bg>
+      <p:bgPr>
+        <a:solidFill>
+          <a:srgbClr val="F0F4F8"/>
+        </a:solidFill>
+        <a:effectLst/>
+      </p:bgPr>
+    </p:bg>
     <p:spTree>
       <p:nvGrpSpPr>
         <p:cNvPr id="1" name=""/>
@@ -8321,93 +8329,24 @@
       </p:grpSpPr>
       <p:sp>
         <p:nvSpPr>
-          <p:cNvPr id="2" name="Text 0"/>
-          <p:cNvSpPr/>
-          <p:nvPr/>
-        </p:nvSpPr>
-        <p:spPr>
-          <a:xfrm>
-            <a:off x="274320" y="171450"/>
-            <a:ext cx="5486400" cy="342900"/>
-          </a:xfrm>
-          <a:prstGeom prst="rect">
-            <a:avLst/>
-          </a:prstGeom>
-          <a:noFill/>
-          <a:ln/>
-        </p:spPr>
-        <p:txBody>
-          <a:bodyPr wrap="square" rtlCol="0" anchor="ctr"/>
-          <a:lstStyle/>
-          <a:p>
-            <a:r>
-              <a:rPr lang="en-US" b="1" dirty="0">
-                <a:solidFill>
-                  <a:srgbClr val="0E7490"/>
-                </a:solidFill>
-              </a:rPr>
-              <a:t>Pipeline Architecture</a:t>
-            </a:r>
-            <a:endParaRPr lang="en-US" dirty="0"/>
-          </a:p>
-        </p:txBody>
-      </p:sp>
-      <p:sp>
-        <p:nvSpPr>
-          <p:cNvPr id="3" name="Text 1"/>
-          <p:cNvSpPr/>
-          <p:nvPr/>
-        </p:nvSpPr>
-        <p:spPr>
-          <a:xfrm>
-            <a:off x="5829300" y="219456"/>
-            <a:ext cx="3017520" cy="274320"/>
-          </a:xfrm>
-          <a:prstGeom prst="rect">
-            <a:avLst/>
-          </a:prstGeom>
-          <a:noFill/>
-          <a:ln/>
-        </p:spPr>
-        <p:txBody>
-          <a:bodyPr wrap="square" rtlCol="0" anchor="ctr"/>
-          <a:lstStyle/>
-          <a:p>
-            <a:pPr algn="r"/>
-            <a:r>
-              <a:rPr lang="en-US" sz="900" dirty="0">
-                <a:solidFill>
-                  <a:srgbClr val="64748B"/>
-                </a:solidFill>
-              </a:rPr>
-              <a:t>Batch ingestion · Daily schedule</a:t>
-            </a:r>
-            <a:endParaRPr lang="en-US" sz="900" dirty="0"/>
-          </a:p>
-        </p:txBody>
-      </p:sp>
-      <p:sp>
-        <p:nvSpPr>
-          <p:cNvPr id="4" name="Shape 2"/>
-          <p:cNvSpPr/>
-          <p:nvPr/>
-        </p:nvSpPr>
-        <p:spPr>
-          <a:xfrm>
-            <a:off x="274320" y="582930"/>
-            <a:ext cx="8572500" cy="377190"/>
-          </a:xfrm>
-          <a:prstGeom prst="roundRect">
-            <a:avLst>
-              <a:gd name="adj" fmla="val 14545"/>
-            </a:avLst>
+          <p:cNvPr id="2" name="Shape 0"/>
+          <p:cNvSpPr/>
+          <p:nvPr/>
+        </p:nvSpPr>
+        <p:spPr>
+          <a:xfrm>
+            <a:off x="0" y="0"/>
+            <a:ext cx="9144000" cy="777240"/>
+          </a:xfrm>
+          <a:prstGeom prst="rect">
+            <a:avLst/>
           </a:prstGeom>
           <a:solidFill>
-            <a:srgbClr val="EEF2FF"/>
+            <a:srgbClr val="0D1B2A"/>
           </a:solidFill>
           <a:ln w="12700">
             <a:solidFill>
-              <a:srgbClr val="6366F1"/>
+              <a:srgbClr val="0D1B2A"/>
             </a:solidFill>
             <a:prstDash val="solid"/>
           </a:ln>
@@ -8415,91 +8354,118 @@
       </p:sp>
       <p:sp>
         <p:nvSpPr>
-          <p:cNvPr id="5" name="Text 3"/>
-          <p:cNvSpPr/>
-          <p:nvPr/>
-        </p:nvSpPr>
-        <p:spPr>
-          <a:xfrm>
-            <a:off x="274320" y="582930"/>
-            <a:ext cx="8572500" cy="377190"/>
-          </a:xfrm>
-          <a:prstGeom prst="rect">
-            <a:avLst/>
-          </a:prstGeom>
-          <a:noFill/>
-          <a:ln/>
-        </p:spPr>
-        <p:txBody>
-          <a:bodyPr wrap="square" rtlCol="0" anchor="ctr"/>
-          <a:lstStyle/>
-          <a:p>
-            <a:pPr algn="ctr"/>
-            <a:r>
-              <a:rPr lang="en-US" sz="975" b="1" dirty="0">
-                <a:solidFill>
-                  <a:srgbClr val="D97706"/>
-                </a:solidFill>
-              </a:rPr>
-              <a:t>🔒  </a:t>
-            </a:r>
-            <a:r>
-              <a:rPr lang="en-US" sz="975" b="1" dirty="0">
-                <a:solidFill>
-                  <a:srgbClr val="1E293B"/>
-                </a:solidFill>
-              </a:rPr>
-              <a:t>Azure Key Vault </a:t>
-            </a:r>
-            <a:r>
-              <a:rPr lang="en-US" sz="975" dirty="0">
-                <a:solidFill>
-                  <a:srgbClr val="475569"/>
-                </a:solidFill>
-              </a:rPr>
-              <a:t>— Secures all credentials throughout the pipeline</a:t>
-            </a:r>
-            <a:endParaRPr lang="en-US" sz="975" dirty="0"/>
-          </a:p>
-        </p:txBody>
-      </p:sp>
-      <p:sp>
-        <p:nvSpPr>
-          <p:cNvPr id="6" name="Shape 4"/>
-          <p:cNvSpPr/>
-          <p:nvPr/>
-        </p:nvSpPr>
-        <p:spPr>
-          <a:xfrm>
-            <a:off x="397764" y="1165860"/>
-            <a:ext cx="1062990" cy="1165860"/>
-          </a:xfrm>
-          <a:prstGeom prst="roundRect">
-            <a:avLst>
-              <a:gd name="adj" fmla="val 5161"/>
-            </a:avLst>
+          <p:cNvPr id="3" name="Text 1"/>
+          <p:cNvSpPr/>
+          <p:nvPr/>
+        </p:nvSpPr>
+        <p:spPr>
+          <a:xfrm>
+            <a:off x="365760" y="0"/>
+            <a:ext cx="8229600" cy="777240"/>
+          </a:xfrm>
+          <a:prstGeom prst="rect">
+            <a:avLst/>
+          </a:prstGeom>
+          <a:noFill/>
+          <a:ln/>
+        </p:spPr>
+        <p:txBody>
+          <a:bodyPr wrap="square" lIns="0" tIns="0" rIns="0" bIns="0" rtlCol="0" anchor="ctr"/>
+          <a:lstStyle/>
+          <a:p>
+            <a:pPr marL="0" indent="0">
+              <a:buNone/>
+            </a:pPr>
+            <a:r>
+              <a:rPr lang="en-US" sz="1300" b="1" kern="0" spc="300" dirty="0">
+                <a:solidFill>
+                  <a:srgbClr val="00B4D8"/>
+                </a:solidFill>
+              </a:rPr>
+              <a:t>PROJECT OVERVIEW</a:t>
+            </a:r>
+            <a:endParaRPr lang="en-US" sz="1300" dirty="0"/>
+          </a:p>
+        </p:txBody>
+      </p:sp>
+      <p:sp>
+        <p:nvSpPr>
+          <p:cNvPr id="4" name="Text 2"/>
+          <p:cNvSpPr/>
+          <p:nvPr/>
+        </p:nvSpPr>
+        <p:spPr>
+          <a:xfrm>
+            <a:off x="365760" y="0"/>
+            <a:ext cx="8229600" cy="777240"/>
+          </a:xfrm>
+          <a:prstGeom prst="rect">
+            <a:avLst/>
+          </a:prstGeom>
+          <a:noFill/>
+          <a:ln/>
+        </p:spPr>
+        <p:txBody>
+          <a:bodyPr wrap="square" lIns="0" tIns="0" rIns="0" bIns="0" rtlCol="0" anchor="ctr"/>
+          <a:lstStyle/>
+          <a:p>
+            <a:pPr marL="0" indent="0" algn="r">
+              <a:buNone/>
+            </a:pPr>
+            <a:r>
+              <a:rPr lang="en-US" sz="1300" b="1" dirty="0">
+                <a:solidFill>
+                  <a:srgbClr val="FFFFFF"/>
+                </a:solidFill>
+              </a:rPr>
+              <a:t>What I built and why</a:t>
+            </a:r>
+            <a:endParaRPr lang="en-US" sz="1300" dirty="0"/>
+          </a:p>
+        </p:txBody>
+      </p:sp>
+      <p:sp>
+        <p:nvSpPr>
+          <p:cNvPr id="5" name="Shape 3"/>
+          <p:cNvSpPr/>
+          <p:nvPr/>
+        </p:nvSpPr>
+        <p:spPr>
+          <a:xfrm>
+            <a:off x="365760" y="960120"/>
+            <a:ext cx="8412480" cy="914400"/>
+          </a:xfrm>
+          <a:prstGeom prst="rect">
+            <a:avLst/>
           </a:prstGeom>
           <a:solidFill>
-            <a:srgbClr val="CCFBF1"/>
+            <a:srgbClr val="0D1B2A"/>
           </a:solidFill>
-          <a:ln w="25400">
+          <a:ln w="12700">
             <a:solidFill>
-              <a:srgbClr val="14B8A6"/>
+              <a:srgbClr val="0D1B2A"/>
             </a:solidFill>
             <a:prstDash val="solid"/>
           </a:ln>
-        </p:spPr>
-      </p:sp>
-      <p:sp>
-        <p:nvSpPr>
-          <p:cNvPr id="7" name="Text 5"/>
-          <p:cNvSpPr/>
-          <p:nvPr/>
-        </p:nvSpPr>
-        <p:spPr>
-          <a:xfrm>
-            <a:off x="1255014" y="1179576"/>
-            <a:ext cx="171450" cy="137160"/>
+          <a:effectLst>
+            <a:outerShdw blurRad="101600" dist="38100" dir="8100000" algn="bl" rotWithShape="0">
+              <a:srgbClr val="000000">
+                <a:alpha val="12000"/>
+              </a:srgbClr>
+            </a:outerShdw>
+          </a:effectLst>
+        </p:spPr>
+      </p:sp>
+      <p:sp>
+        <p:nvSpPr>
+          <p:cNvPr id="6" name="Text 4"/>
+          <p:cNvSpPr/>
+          <p:nvPr/>
+        </p:nvSpPr>
+        <p:spPr>
+          <a:xfrm>
+            <a:off x="502920" y="960120"/>
+            <a:ext cx="8138160" cy="914400"/>
           </a:xfrm>
           <a:prstGeom prst="rect">
             <a:avLst/>
@@ -8511,1836 +8477,747 @@
           <a:bodyPr wrap="square" rtlCol="0" anchor="ctr"/>
           <a:lstStyle/>
           <a:p>
-            <a:pPr algn="r"/>
-            <a:r>
-              <a:rPr lang="en-US" sz="675" dirty="0">
-                <a:solidFill>
-                  <a:srgbClr val="64748B"/>
-                </a:solidFill>
-              </a:rPr>
-              <a:t>1</a:t>
-            </a:r>
-            <a:endParaRPr lang="en-US" sz="675" dirty="0"/>
-          </a:p>
-        </p:txBody>
-      </p:sp>
-      <p:sp>
-        <p:nvSpPr>
-          <p:cNvPr id="8" name="Text 6"/>
-          <p:cNvSpPr/>
-          <p:nvPr/>
-        </p:nvSpPr>
-        <p:spPr>
-          <a:xfrm>
-            <a:off x="397764" y="1268730"/>
-            <a:ext cx="1062990" cy="342900"/>
-          </a:xfrm>
-          <a:prstGeom prst="rect">
-            <a:avLst/>
-          </a:prstGeom>
-          <a:noFill/>
-          <a:ln/>
-        </p:spPr>
-        <p:txBody>
-          <a:bodyPr wrap="square" rtlCol="0" anchor="ctr"/>
-          <a:lstStyle/>
-          <a:p>
-            <a:pPr algn="ctr"/>
-            <a:r>
-              <a:rPr lang="en-US" dirty="0">
-                <a:solidFill>
-                  <a:srgbClr val="000000"/>
-                </a:solidFill>
-              </a:rPr>
-              <a:t>📡</a:t>
-            </a:r>
-            <a:endParaRPr lang="en-US" dirty="0"/>
-          </a:p>
-        </p:txBody>
-      </p:sp>
-      <p:sp>
-        <p:nvSpPr>
-          <p:cNvPr id="9" name="Text 7"/>
-          <p:cNvSpPr/>
-          <p:nvPr/>
-        </p:nvSpPr>
-        <p:spPr>
-          <a:xfrm>
-            <a:off x="397764" y="1680210"/>
-            <a:ext cx="1062990" cy="240030"/>
-          </a:xfrm>
-          <a:prstGeom prst="rect">
-            <a:avLst/>
-          </a:prstGeom>
-          <a:noFill/>
-          <a:ln/>
-        </p:spPr>
-        <p:txBody>
-          <a:bodyPr wrap="square" rtlCol="0" anchor="ctr"/>
-          <a:lstStyle/>
-          <a:p>
-            <a:pPr algn="ctr"/>
-            <a:r>
-              <a:rPr lang="en-US" sz="825" b="1" dirty="0">
-                <a:solidFill>
-                  <a:srgbClr val="0F172A"/>
-                </a:solidFill>
-              </a:rPr>
-              <a:t>Trafiklab</a:t>
-            </a:r>
-            <a:endParaRPr lang="en-US" sz="825" dirty="0"/>
-          </a:p>
-        </p:txBody>
-      </p:sp>
-      <p:sp>
-        <p:nvSpPr>
-          <p:cNvPr id="10" name="Text 8"/>
-          <p:cNvSpPr/>
-          <p:nvPr/>
-        </p:nvSpPr>
-        <p:spPr>
-          <a:xfrm>
-            <a:off x="397764" y="1920240"/>
-            <a:ext cx="1062990" cy="342900"/>
-          </a:xfrm>
-          <a:prstGeom prst="rect">
-            <a:avLst/>
-          </a:prstGeom>
-          <a:noFill/>
-          <a:ln/>
-        </p:spPr>
-        <p:txBody>
-          <a:bodyPr wrap="square" rtlCol="0" anchor="ctr"/>
-          <a:lstStyle/>
-          <a:p>
-            <a:pPr algn="ctr"/>
-            <a:r>
-              <a:rPr lang="en-US" sz="675" b="1" dirty="0">
-                <a:solidFill>
-                  <a:srgbClr val="0F766E"/>
-                </a:solidFill>
-              </a:rPr>
-              <a:t>GTFS Static API</a:t>
-            </a:r>
-            <a:endParaRPr lang="en-US" sz="675" dirty="0"/>
-          </a:p>
-        </p:txBody>
-      </p:sp>
-      <p:sp>
-        <p:nvSpPr>
-          <p:cNvPr id="11" name="Text 9"/>
-          <p:cNvSpPr/>
-          <p:nvPr/>
-        </p:nvSpPr>
-        <p:spPr>
-          <a:xfrm>
-            <a:off x="1467612" y="1645920"/>
-            <a:ext cx="137160" cy="274320"/>
-          </a:xfrm>
-          <a:prstGeom prst="rect">
-            <a:avLst/>
-          </a:prstGeom>
-          <a:noFill/>
-          <a:ln/>
-        </p:spPr>
-        <p:txBody>
-          <a:bodyPr wrap="square" rtlCol="0" anchor="ctr"/>
-          <a:lstStyle/>
-          <a:p>
-            <a:pPr algn="ctr"/>
-            <a:r>
-              <a:rPr lang="en-US" sz="1500" b="1" dirty="0">
-                <a:solidFill>
-                  <a:srgbClr val="0891B2"/>
-                </a:solidFill>
-              </a:rPr>
-              <a:t>→</a:t>
-            </a:r>
-            <a:endParaRPr lang="en-US" sz="1500" dirty="0"/>
-          </a:p>
-        </p:txBody>
-      </p:sp>
-      <p:sp>
-        <p:nvSpPr>
-          <p:cNvPr id="12" name="Shape 10"/>
-          <p:cNvSpPr/>
-          <p:nvPr/>
-        </p:nvSpPr>
-        <p:spPr>
-          <a:xfrm>
-            <a:off x="1611630" y="1165860"/>
-            <a:ext cx="1062990" cy="1165860"/>
-          </a:xfrm>
-          <a:prstGeom prst="roundRect">
-            <a:avLst>
-              <a:gd name="adj" fmla="val 5161"/>
-            </a:avLst>
-          </a:prstGeom>
-          <a:solidFill>
-            <a:srgbClr val="CCFBF1"/>
-          </a:solidFill>
-          <a:ln w="25400">
-            <a:solidFill>
-              <a:srgbClr val="14B8A6"/>
-            </a:solidFill>
-            <a:prstDash val="solid"/>
-          </a:ln>
-        </p:spPr>
-      </p:sp>
-      <p:sp>
-        <p:nvSpPr>
-          <p:cNvPr id="13" name="Text 11"/>
-          <p:cNvSpPr/>
-          <p:nvPr/>
-        </p:nvSpPr>
-        <p:spPr>
-          <a:xfrm>
-            <a:off x="2468880" y="1179576"/>
-            <a:ext cx="171450" cy="137160"/>
-          </a:xfrm>
-          <a:prstGeom prst="rect">
-            <a:avLst/>
-          </a:prstGeom>
-          <a:noFill/>
-          <a:ln/>
-        </p:spPr>
-        <p:txBody>
-          <a:bodyPr wrap="square" rtlCol="0" anchor="ctr"/>
-          <a:lstStyle/>
-          <a:p>
-            <a:pPr algn="r"/>
-            <a:r>
-              <a:rPr lang="en-US" sz="675" dirty="0">
-                <a:solidFill>
-                  <a:srgbClr val="64748B"/>
-                </a:solidFill>
-              </a:rPr>
-              <a:t>2</a:t>
-            </a:r>
-            <a:endParaRPr lang="en-US" sz="675" dirty="0"/>
-          </a:p>
-        </p:txBody>
-      </p:sp>
-      <p:sp>
-        <p:nvSpPr>
-          <p:cNvPr id="14" name="Text 12"/>
-          <p:cNvSpPr/>
-          <p:nvPr/>
-        </p:nvSpPr>
-        <p:spPr>
-          <a:xfrm>
-            <a:off x="1611630" y="1268730"/>
-            <a:ext cx="1062990" cy="342900"/>
-          </a:xfrm>
-          <a:prstGeom prst="rect">
-            <a:avLst/>
-          </a:prstGeom>
-          <a:noFill/>
-          <a:ln/>
-        </p:spPr>
-        <p:txBody>
-          <a:bodyPr wrap="square" rtlCol="0" anchor="ctr"/>
-          <a:lstStyle/>
-          <a:p>
-            <a:pPr algn="ctr"/>
-            <a:r>
-              <a:rPr lang="en-US" dirty="0">
-                <a:solidFill>
-                  <a:srgbClr val="000000"/>
-                </a:solidFill>
-              </a:rPr>
-              <a:t>📄</a:t>
-            </a:r>
-            <a:endParaRPr lang="en-US" dirty="0"/>
-          </a:p>
-        </p:txBody>
-      </p:sp>
-      <p:sp>
-        <p:nvSpPr>
-          <p:cNvPr id="15" name="Text 13"/>
-          <p:cNvSpPr/>
-          <p:nvPr/>
-        </p:nvSpPr>
-        <p:spPr>
-          <a:xfrm>
-            <a:off x="1611630" y="1680210"/>
-            <a:ext cx="1062990" cy="240030"/>
-          </a:xfrm>
-          <a:prstGeom prst="rect">
-            <a:avLst/>
-          </a:prstGeom>
-          <a:noFill/>
-          <a:ln/>
-        </p:spPr>
-        <p:txBody>
-          <a:bodyPr wrap="square" rtlCol="0" anchor="ctr"/>
-          <a:lstStyle/>
-          <a:p>
-            <a:pPr algn="ctr"/>
-            <a:r>
-              <a:rPr lang="en-US" sz="825" b="1" dirty="0">
-                <a:solidFill>
-                  <a:srgbClr val="0F172A"/>
-                </a:solidFill>
-              </a:rPr>
-              <a:t>upload_stops.py</a:t>
-            </a:r>
-            <a:endParaRPr lang="en-US" sz="825" dirty="0"/>
-          </a:p>
-        </p:txBody>
-      </p:sp>
-      <p:sp>
-        <p:nvSpPr>
-          <p:cNvPr id="16" name="Text 14"/>
-          <p:cNvSpPr/>
-          <p:nvPr/>
-        </p:nvSpPr>
-        <p:spPr>
-          <a:xfrm>
-            <a:off x="1611630" y="1920240"/>
-            <a:ext cx="1062990" cy="342900"/>
-          </a:xfrm>
-          <a:prstGeom prst="rect">
-            <a:avLst/>
-          </a:prstGeom>
-          <a:noFill/>
-          <a:ln/>
-        </p:spPr>
-        <p:txBody>
-          <a:bodyPr wrap="square" rtlCol="0" anchor="ctr"/>
-          <a:lstStyle/>
-          <a:p>
-            <a:pPr algn="ctr"/>
-            <a:r>
-              <a:rPr lang="en-US" sz="675" b="1" dirty="0">
-                <a:solidFill>
-                  <a:srgbClr val="0F766E"/>
-                </a:solidFill>
-              </a:rPr>
-              <a:t>Python script</a:t>
-            </a:r>
-            <a:endParaRPr lang="en-US" sz="675" dirty="0"/>
-          </a:p>
-        </p:txBody>
-      </p:sp>
-      <p:sp>
-        <p:nvSpPr>
-          <p:cNvPr id="17" name="Text 15"/>
-          <p:cNvSpPr/>
-          <p:nvPr/>
-        </p:nvSpPr>
-        <p:spPr>
-          <a:xfrm>
-            <a:off x="2681478" y="1645920"/>
-            <a:ext cx="137160" cy="274320"/>
-          </a:xfrm>
-          <a:prstGeom prst="rect">
-            <a:avLst/>
-          </a:prstGeom>
-          <a:noFill/>
-          <a:ln/>
-        </p:spPr>
-        <p:txBody>
-          <a:bodyPr wrap="square" rtlCol="0" anchor="ctr"/>
-          <a:lstStyle/>
-          <a:p>
-            <a:pPr algn="ctr"/>
-            <a:r>
-              <a:rPr lang="en-US" sz="1500" b="1" dirty="0">
-                <a:solidFill>
-                  <a:srgbClr val="0891B2"/>
-                </a:solidFill>
-              </a:rPr>
-              <a:t>→</a:t>
-            </a:r>
-            <a:endParaRPr lang="en-US" sz="1500" dirty="0"/>
-          </a:p>
-        </p:txBody>
-      </p:sp>
-      <p:sp>
-        <p:nvSpPr>
-          <p:cNvPr id="18" name="Shape 16"/>
-          <p:cNvSpPr/>
-          <p:nvPr/>
-        </p:nvSpPr>
-        <p:spPr>
-          <a:xfrm>
-            <a:off x="2825496" y="1165860"/>
-            <a:ext cx="1062990" cy="1165860"/>
-          </a:xfrm>
-          <a:prstGeom prst="roundRect">
-            <a:avLst>
-              <a:gd name="adj" fmla="val 5161"/>
-            </a:avLst>
-          </a:prstGeom>
-          <a:solidFill>
-            <a:srgbClr val="DBEAFE"/>
-          </a:solidFill>
-          <a:ln w="25400">
-            <a:solidFill>
-              <a:srgbClr val="3B82F6"/>
-            </a:solidFill>
-            <a:prstDash val="solid"/>
-          </a:ln>
-        </p:spPr>
-      </p:sp>
-      <p:sp>
-        <p:nvSpPr>
-          <p:cNvPr id="19" name="Text 17"/>
-          <p:cNvSpPr/>
-          <p:nvPr/>
-        </p:nvSpPr>
-        <p:spPr>
-          <a:xfrm>
-            <a:off x="3682746" y="1179576"/>
-            <a:ext cx="171450" cy="137160"/>
-          </a:xfrm>
-          <a:prstGeom prst="rect">
-            <a:avLst/>
-          </a:prstGeom>
-          <a:noFill/>
-          <a:ln/>
-        </p:spPr>
-        <p:txBody>
-          <a:bodyPr wrap="square" rtlCol="0" anchor="ctr"/>
-          <a:lstStyle/>
-          <a:p>
-            <a:pPr algn="r"/>
-            <a:r>
-              <a:rPr lang="en-US" sz="675" dirty="0">
-                <a:solidFill>
-                  <a:srgbClr val="64748B"/>
-                </a:solidFill>
-              </a:rPr>
-              <a:t>3</a:t>
-            </a:r>
-            <a:endParaRPr lang="en-US" sz="675" dirty="0"/>
-          </a:p>
-        </p:txBody>
-      </p:sp>
-      <p:sp>
-        <p:nvSpPr>
-          <p:cNvPr id="20" name="Text 18"/>
-          <p:cNvSpPr/>
-          <p:nvPr/>
-        </p:nvSpPr>
-        <p:spPr>
-          <a:xfrm>
-            <a:off x="2825496" y="1268730"/>
-            <a:ext cx="1062990" cy="342900"/>
-          </a:xfrm>
-          <a:prstGeom prst="rect">
-            <a:avLst/>
-          </a:prstGeom>
-          <a:noFill/>
-          <a:ln/>
-        </p:spPr>
-        <p:txBody>
-          <a:bodyPr wrap="square" rtlCol="0" anchor="ctr"/>
-          <a:lstStyle/>
-          <a:p>
-            <a:pPr algn="ctr"/>
-            <a:r>
-              <a:rPr lang="en-US" dirty="0">
-                <a:solidFill>
-                  <a:srgbClr val="000000"/>
-                </a:solidFill>
-              </a:rPr>
-              <a:t>💾</a:t>
-            </a:r>
-            <a:endParaRPr lang="en-US" dirty="0"/>
-          </a:p>
-        </p:txBody>
-      </p:sp>
-      <p:sp>
-        <p:nvSpPr>
-          <p:cNvPr id="21" name="Text 19"/>
-          <p:cNvSpPr/>
-          <p:nvPr/>
-        </p:nvSpPr>
-        <p:spPr>
-          <a:xfrm>
-            <a:off x="2825496" y="1680210"/>
-            <a:ext cx="1062990" cy="240030"/>
-          </a:xfrm>
-          <a:prstGeom prst="rect">
-            <a:avLst/>
-          </a:prstGeom>
-          <a:noFill/>
-          <a:ln/>
-        </p:spPr>
-        <p:txBody>
-          <a:bodyPr wrap="square" rtlCol="0" anchor="ctr"/>
-          <a:lstStyle/>
-          <a:p>
-            <a:pPr algn="ctr"/>
-            <a:r>
-              <a:rPr lang="en-US" sz="825" b="1" dirty="0">
-                <a:solidFill>
-                  <a:srgbClr val="0F172A"/>
-                </a:solidFill>
-              </a:rPr>
-              <a:t>ADLS Gen2</a:t>
-            </a:r>
-            <a:endParaRPr lang="en-US" sz="825" dirty="0"/>
-          </a:p>
-        </p:txBody>
-      </p:sp>
-      <p:sp>
-        <p:nvSpPr>
-          <p:cNvPr id="22" name="Text 20"/>
-          <p:cNvSpPr/>
-          <p:nvPr/>
-        </p:nvSpPr>
-        <p:spPr>
-          <a:xfrm>
-            <a:off x="2825496" y="1920240"/>
-            <a:ext cx="1062990" cy="342900"/>
-          </a:xfrm>
-          <a:prstGeom prst="rect">
-            <a:avLst/>
-          </a:prstGeom>
-          <a:noFill/>
-          <a:ln/>
-        </p:spPr>
-        <p:txBody>
-          <a:bodyPr wrap="square" rtlCol="0" anchor="ctr"/>
-          <a:lstStyle/>
-          <a:p>
-            <a:pPr algn="ctr"/>
-            <a:r>
-              <a:rPr lang="en-US" sz="675" b="1" dirty="0">
-                <a:solidFill>
-                  <a:srgbClr val="1D4ED8"/>
-                </a:solidFill>
-              </a:rPr>
-              <a:t>Bronze container</a:t>
-            </a:r>
-            <a:endParaRPr lang="en-US" sz="675" dirty="0"/>
-          </a:p>
-        </p:txBody>
-      </p:sp>
-      <p:sp>
-        <p:nvSpPr>
-          <p:cNvPr id="23" name="Text 21"/>
-          <p:cNvSpPr/>
-          <p:nvPr/>
-        </p:nvSpPr>
-        <p:spPr>
-          <a:xfrm>
-            <a:off x="3895344" y="1645920"/>
-            <a:ext cx="137160" cy="274320"/>
-          </a:xfrm>
-          <a:prstGeom prst="rect">
-            <a:avLst/>
-          </a:prstGeom>
-          <a:noFill/>
-          <a:ln/>
-        </p:spPr>
-        <p:txBody>
-          <a:bodyPr wrap="square" rtlCol="0" anchor="ctr"/>
-          <a:lstStyle/>
-          <a:p>
-            <a:pPr algn="ctr"/>
-            <a:r>
-              <a:rPr lang="en-US" sz="1500" b="1" dirty="0">
-                <a:solidFill>
-                  <a:srgbClr val="0891B2"/>
-                </a:solidFill>
-              </a:rPr>
-              <a:t>→</a:t>
-            </a:r>
-            <a:endParaRPr lang="en-US" sz="1500" dirty="0"/>
-          </a:p>
-        </p:txBody>
-      </p:sp>
-      <p:sp>
-        <p:nvSpPr>
-          <p:cNvPr id="24" name="Shape 22"/>
-          <p:cNvSpPr/>
-          <p:nvPr/>
-        </p:nvSpPr>
-        <p:spPr>
-          <a:xfrm>
-            <a:off x="4039362" y="1165860"/>
-            <a:ext cx="1062990" cy="1165860"/>
-          </a:xfrm>
-          <a:prstGeom prst="roundRect">
-            <a:avLst>
-              <a:gd name="adj" fmla="val 5161"/>
-            </a:avLst>
-          </a:prstGeom>
-          <a:solidFill>
-            <a:srgbClr val="CCFBF1"/>
-          </a:solidFill>
-          <a:ln w="25400">
-            <a:solidFill>
-              <a:srgbClr val="14B8A6"/>
-            </a:solidFill>
-            <a:prstDash val="solid"/>
-          </a:ln>
-        </p:spPr>
-      </p:sp>
-      <p:sp>
-        <p:nvSpPr>
-          <p:cNvPr id="25" name="Text 23"/>
-          <p:cNvSpPr/>
-          <p:nvPr/>
-        </p:nvSpPr>
-        <p:spPr>
-          <a:xfrm>
-            <a:off x="4896612" y="1179576"/>
-            <a:ext cx="171450" cy="137160"/>
-          </a:xfrm>
-          <a:prstGeom prst="rect">
-            <a:avLst/>
-          </a:prstGeom>
-          <a:noFill/>
-          <a:ln/>
-        </p:spPr>
-        <p:txBody>
-          <a:bodyPr wrap="square" rtlCol="0" anchor="ctr"/>
-          <a:lstStyle/>
-          <a:p>
-            <a:pPr algn="r"/>
-            <a:r>
-              <a:rPr lang="en-US" sz="675" dirty="0">
-                <a:solidFill>
-                  <a:srgbClr val="64748B"/>
-                </a:solidFill>
-              </a:rPr>
-              <a:t>4</a:t>
-            </a:r>
-            <a:endParaRPr lang="en-US" sz="675" dirty="0"/>
-          </a:p>
-        </p:txBody>
-      </p:sp>
-      <p:sp>
-        <p:nvSpPr>
-          <p:cNvPr id="26" name="Text 24"/>
-          <p:cNvSpPr/>
-          <p:nvPr/>
-        </p:nvSpPr>
-        <p:spPr>
-          <a:xfrm>
-            <a:off x="4039362" y="1268730"/>
-            <a:ext cx="1062990" cy="342900"/>
-          </a:xfrm>
-          <a:prstGeom prst="rect">
-            <a:avLst/>
-          </a:prstGeom>
-          <a:noFill/>
-          <a:ln/>
-        </p:spPr>
-        <p:txBody>
-          <a:bodyPr wrap="square" rtlCol="0" anchor="ctr"/>
-          <a:lstStyle/>
-          <a:p>
-            <a:pPr algn="ctr"/>
-            <a:r>
-              <a:rPr lang="en-US" dirty="0">
-                <a:solidFill>
-                  <a:srgbClr val="000000"/>
-                </a:solidFill>
-              </a:rPr>
-              <a:t>🏭</a:t>
-            </a:r>
-            <a:endParaRPr lang="en-US" dirty="0"/>
-          </a:p>
-        </p:txBody>
-      </p:sp>
-      <p:sp>
-        <p:nvSpPr>
-          <p:cNvPr id="27" name="Text 25"/>
-          <p:cNvSpPr/>
-          <p:nvPr/>
-        </p:nvSpPr>
-        <p:spPr>
-          <a:xfrm>
-            <a:off x="4039362" y="1680210"/>
-            <a:ext cx="1062990" cy="240030"/>
-          </a:xfrm>
-          <a:prstGeom prst="rect">
-            <a:avLst/>
-          </a:prstGeom>
-          <a:noFill/>
-          <a:ln/>
-        </p:spPr>
-        <p:txBody>
-          <a:bodyPr wrap="square" rtlCol="0" anchor="ctr"/>
-          <a:lstStyle/>
-          <a:p>
-            <a:pPr algn="ctr"/>
-            <a:r>
-              <a:rPr lang="en-US" sz="825" b="1" dirty="0">
-                <a:solidFill>
-                  <a:srgbClr val="0F172A"/>
-                </a:solidFill>
-              </a:rPr>
-              <a:t>ADF</a:t>
-            </a:r>
-            <a:endParaRPr lang="en-US" sz="825" dirty="0"/>
-          </a:p>
-        </p:txBody>
-      </p:sp>
-      <p:sp>
-        <p:nvSpPr>
-          <p:cNvPr id="28" name="Text 26"/>
-          <p:cNvSpPr/>
-          <p:nvPr/>
-        </p:nvSpPr>
-        <p:spPr>
-          <a:xfrm>
-            <a:off x="4039362" y="1920240"/>
-            <a:ext cx="1062990" cy="342900"/>
-          </a:xfrm>
-          <a:prstGeom prst="rect">
-            <a:avLst/>
-          </a:prstGeom>
-          <a:noFill/>
-          <a:ln/>
-        </p:spPr>
-        <p:txBody>
-          <a:bodyPr wrap="square" rtlCol="0" anchor="ctr"/>
-          <a:lstStyle/>
-          <a:p>
-            <a:pPr algn="ctr"/>
-            <a:r>
-              <a:rPr lang="en-US" sz="675" b="1" dirty="0">
-                <a:solidFill>
-                  <a:srgbClr val="0F766E"/>
-                </a:solidFill>
-              </a:rPr>
-              <a:t>Daily trigger</a:t>
-            </a:r>
-            <a:endParaRPr lang="en-US" sz="675" dirty="0"/>
-          </a:p>
-        </p:txBody>
-      </p:sp>
-      <p:sp>
-        <p:nvSpPr>
-          <p:cNvPr id="29" name="Text 27"/>
-          <p:cNvSpPr/>
-          <p:nvPr/>
-        </p:nvSpPr>
-        <p:spPr>
-          <a:xfrm>
-            <a:off x="5109210" y="1645920"/>
-            <a:ext cx="137160" cy="274320"/>
-          </a:xfrm>
-          <a:prstGeom prst="rect">
-            <a:avLst/>
-          </a:prstGeom>
-          <a:noFill/>
-          <a:ln/>
-        </p:spPr>
-        <p:txBody>
-          <a:bodyPr wrap="square" rtlCol="0" anchor="ctr"/>
-          <a:lstStyle/>
-          <a:p>
-            <a:pPr algn="ctr"/>
-            <a:r>
-              <a:rPr lang="en-US" sz="1500" b="1" dirty="0">
-                <a:solidFill>
-                  <a:srgbClr val="0891B2"/>
-                </a:solidFill>
-              </a:rPr>
-              <a:t>→</a:t>
-            </a:r>
-            <a:endParaRPr lang="en-US" sz="1500" dirty="0"/>
-          </a:p>
-        </p:txBody>
-      </p:sp>
-      <p:sp>
-        <p:nvSpPr>
-          <p:cNvPr id="30" name="Shape 28"/>
-          <p:cNvSpPr/>
-          <p:nvPr/>
-        </p:nvSpPr>
-        <p:spPr>
-          <a:xfrm>
-            <a:off x="5253228" y="1165860"/>
-            <a:ext cx="1062990" cy="1165860"/>
-          </a:xfrm>
-          <a:prstGeom prst="roundRect">
-            <a:avLst>
-              <a:gd name="adj" fmla="val 5161"/>
-            </a:avLst>
-          </a:prstGeom>
-          <a:solidFill>
-            <a:srgbClr val="CCFBF1"/>
-          </a:solidFill>
-          <a:ln w="25400">
-            <a:solidFill>
-              <a:srgbClr val="14B8A6"/>
-            </a:solidFill>
-            <a:prstDash val="solid"/>
-          </a:ln>
-        </p:spPr>
-      </p:sp>
-      <p:sp>
-        <p:nvSpPr>
-          <p:cNvPr id="31" name="Text 29"/>
-          <p:cNvSpPr/>
-          <p:nvPr/>
-        </p:nvSpPr>
-        <p:spPr>
-          <a:xfrm>
-            <a:off x="6110478" y="1179576"/>
-            <a:ext cx="171450" cy="137160"/>
-          </a:xfrm>
-          <a:prstGeom prst="rect">
-            <a:avLst/>
-          </a:prstGeom>
-          <a:noFill/>
-          <a:ln/>
-        </p:spPr>
-        <p:txBody>
-          <a:bodyPr wrap="square" rtlCol="0" anchor="ctr"/>
-          <a:lstStyle/>
-          <a:p>
-            <a:pPr algn="r"/>
-            <a:r>
-              <a:rPr lang="en-US" sz="675" dirty="0">
-                <a:solidFill>
-                  <a:srgbClr val="64748B"/>
-                </a:solidFill>
-              </a:rPr>
-              <a:t>5</a:t>
-            </a:r>
-            <a:endParaRPr lang="en-US" sz="675" dirty="0"/>
-          </a:p>
-        </p:txBody>
-      </p:sp>
-      <p:sp>
-        <p:nvSpPr>
-          <p:cNvPr id="32" name="Text 30"/>
-          <p:cNvSpPr/>
-          <p:nvPr/>
-        </p:nvSpPr>
-        <p:spPr>
-          <a:xfrm>
-            <a:off x="5253228" y="1268730"/>
-            <a:ext cx="1062990" cy="342900"/>
-          </a:xfrm>
-          <a:prstGeom prst="rect">
-            <a:avLst/>
-          </a:prstGeom>
-          <a:noFill/>
-          <a:ln/>
-        </p:spPr>
-        <p:txBody>
-          <a:bodyPr wrap="square" rtlCol="0" anchor="ctr"/>
-          <a:lstStyle/>
-          <a:p>
-            <a:pPr algn="ctr"/>
-            <a:r>
-              <a:rPr lang="en-US" dirty="0">
-                <a:solidFill>
-                  <a:srgbClr val="000000"/>
-                </a:solidFill>
-              </a:rPr>
-              <a:t>❄️</a:t>
-            </a:r>
-            <a:endParaRPr lang="en-US" dirty="0"/>
-          </a:p>
-        </p:txBody>
-      </p:sp>
-      <p:sp>
-        <p:nvSpPr>
-          <p:cNvPr id="33" name="Text 31"/>
-          <p:cNvSpPr/>
-          <p:nvPr/>
-        </p:nvSpPr>
-        <p:spPr>
-          <a:xfrm>
-            <a:off x="5253228" y="1680210"/>
-            <a:ext cx="1062990" cy="240030"/>
-          </a:xfrm>
-          <a:prstGeom prst="rect">
-            <a:avLst/>
-          </a:prstGeom>
-          <a:noFill/>
-          <a:ln/>
-        </p:spPr>
-        <p:txBody>
-          <a:bodyPr wrap="square" rtlCol="0" anchor="ctr"/>
-          <a:lstStyle/>
-          <a:p>
-            <a:pPr algn="ctr"/>
-            <a:r>
-              <a:rPr lang="en-US" sz="825" b="1" dirty="0">
-                <a:solidFill>
-                  <a:srgbClr val="0F172A"/>
-                </a:solidFill>
-              </a:rPr>
-              <a:t>Snowflake</a:t>
-            </a:r>
-            <a:endParaRPr lang="en-US" sz="825" dirty="0"/>
-          </a:p>
-        </p:txBody>
-      </p:sp>
-      <p:sp>
-        <p:nvSpPr>
-          <p:cNvPr id="34" name="Text 32"/>
-          <p:cNvSpPr/>
-          <p:nvPr/>
-        </p:nvSpPr>
-        <p:spPr>
-          <a:xfrm>
-            <a:off x="5253228" y="1920240"/>
-            <a:ext cx="1062990" cy="342900"/>
-          </a:xfrm>
-          <a:prstGeom prst="rect">
-            <a:avLst/>
-          </a:prstGeom>
-          <a:noFill/>
-          <a:ln/>
-        </p:spPr>
-        <p:txBody>
-          <a:bodyPr wrap="square" rtlCol="0" anchor="ctr"/>
-          <a:lstStyle/>
-          <a:p>
-            <a:pPr algn="ctr"/>
-            <a:r>
-              <a:rPr lang="en-US" sz="675" b="1" dirty="0">
-                <a:solidFill>
-                  <a:srgbClr val="0F766E"/>
-                </a:solidFill>
-              </a:rPr>
-              <a:t>Bronze→Silver→Gold</a:t>
-            </a:r>
-            <a:endParaRPr lang="en-US" sz="675" dirty="0"/>
-          </a:p>
-        </p:txBody>
-      </p:sp>
-      <p:sp>
-        <p:nvSpPr>
-          <p:cNvPr id="35" name="Text 33"/>
-          <p:cNvSpPr/>
-          <p:nvPr/>
-        </p:nvSpPr>
-        <p:spPr>
-          <a:xfrm>
-            <a:off x="6323076" y="1543050"/>
-            <a:ext cx="137160" cy="274320"/>
-          </a:xfrm>
-          <a:prstGeom prst="rect">
-            <a:avLst/>
-          </a:prstGeom>
-          <a:noFill/>
-          <a:ln/>
-        </p:spPr>
-        <p:txBody>
-          <a:bodyPr wrap="square" rtlCol="0" anchor="ctr"/>
-          <a:lstStyle/>
-          <a:p>
-            <a:pPr algn="ctr"/>
-            <a:r>
-              <a:rPr lang="en-US" sz="1350" b="1" dirty="0">
-                <a:solidFill>
-                  <a:srgbClr val="D946EF"/>
-                </a:solidFill>
-              </a:rPr>
-              <a:t>⇆</a:t>
-            </a:r>
-            <a:endParaRPr lang="en-US" sz="1350" dirty="0"/>
-          </a:p>
-        </p:txBody>
-      </p:sp>
-      <p:sp>
-        <p:nvSpPr>
-          <p:cNvPr id="36" name="Text 34"/>
-          <p:cNvSpPr/>
-          <p:nvPr/>
-        </p:nvSpPr>
-        <p:spPr>
-          <a:xfrm>
-            <a:off x="6288786" y="1817370"/>
-            <a:ext cx="205740" cy="137160"/>
-          </a:xfrm>
-          <a:prstGeom prst="rect">
-            <a:avLst/>
-          </a:prstGeom>
-          <a:noFill/>
-          <a:ln/>
-        </p:spPr>
-        <p:txBody>
-          <a:bodyPr wrap="square" rtlCol="0" anchor="ctr"/>
-          <a:lstStyle/>
-          <a:p>
-            <a:pPr algn="ctr"/>
-            <a:r>
-              <a:rPr lang="en-US" sz="525" b="1" dirty="0">
-                <a:solidFill>
-                  <a:srgbClr val="D946EF"/>
-                </a:solidFill>
-              </a:rPr>
-              <a:t>sync</a:t>
-            </a:r>
-            <a:endParaRPr lang="en-US" sz="525" dirty="0"/>
-          </a:p>
-        </p:txBody>
-      </p:sp>
-      <p:sp>
-        <p:nvSpPr>
-          <p:cNvPr id="37" name="Shape 35"/>
-          <p:cNvSpPr/>
-          <p:nvPr/>
-        </p:nvSpPr>
-        <p:spPr>
-          <a:xfrm>
-            <a:off x="6467094" y="1165860"/>
-            <a:ext cx="1062990" cy="1165860"/>
-          </a:xfrm>
-          <a:prstGeom prst="roundRect">
-            <a:avLst>
-              <a:gd name="adj" fmla="val 5161"/>
-            </a:avLst>
-          </a:prstGeom>
-          <a:solidFill>
-            <a:srgbClr val="FEF3C7"/>
-          </a:solidFill>
-          <a:ln w="25400">
-            <a:solidFill>
-              <a:srgbClr val="F59E0B"/>
-            </a:solidFill>
-            <a:prstDash val="solid"/>
-          </a:ln>
-        </p:spPr>
-      </p:sp>
-      <p:sp>
-        <p:nvSpPr>
-          <p:cNvPr id="38" name="Text 36"/>
-          <p:cNvSpPr/>
-          <p:nvPr/>
-        </p:nvSpPr>
-        <p:spPr>
-          <a:xfrm>
-            <a:off x="7324344" y="1179576"/>
-            <a:ext cx="171450" cy="137160"/>
-          </a:xfrm>
-          <a:prstGeom prst="rect">
-            <a:avLst/>
-          </a:prstGeom>
-          <a:noFill/>
-          <a:ln/>
-        </p:spPr>
-        <p:txBody>
-          <a:bodyPr wrap="square" rtlCol="0" anchor="ctr"/>
-          <a:lstStyle/>
-          <a:p>
-            <a:pPr algn="r"/>
-            <a:r>
-              <a:rPr lang="en-US" sz="675" dirty="0">
-                <a:solidFill>
-                  <a:srgbClr val="64748B"/>
-                </a:solidFill>
-              </a:rPr>
-              <a:t>6</a:t>
-            </a:r>
-            <a:endParaRPr lang="en-US" sz="675" dirty="0"/>
-          </a:p>
-        </p:txBody>
-      </p:sp>
-      <p:sp>
-        <p:nvSpPr>
-          <p:cNvPr id="39" name="Text 37"/>
-          <p:cNvSpPr/>
-          <p:nvPr/>
-        </p:nvSpPr>
-        <p:spPr>
-          <a:xfrm>
-            <a:off x="6467094" y="1268730"/>
-            <a:ext cx="1062990" cy="342900"/>
-          </a:xfrm>
-          <a:prstGeom prst="rect">
-            <a:avLst/>
-          </a:prstGeom>
-          <a:noFill/>
-          <a:ln/>
-        </p:spPr>
-        <p:txBody>
-          <a:bodyPr wrap="square" rtlCol="0" anchor="ctr"/>
-          <a:lstStyle/>
-          <a:p>
-            <a:pPr algn="ctr"/>
-            <a:r>
-              <a:rPr lang="en-US" dirty="0">
-                <a:solidFill>
-                  <a:srgbClr val="000000"/>
-                </a:solidFill>
-              </a:rPr>
-              <a:t>🔧</a:t>
-            </a:r>
-            <a:endParaRPr lang="en-US" dirty="0"/>
-          </a:p>
-        </p:txBody>
-      </p:sp>
-      <p:sp>
-        <p:nvSpPr>
-          <p:cNvPr id="40" name="Text 38"/>
-          <p:cNvSpPr/>
-          <p:nvPr/>
-        </p:nvSpPr>
-        <p:spPr>
-          <a:xfrm>
-            <a:off x="6467094" y="1680210"/>
-            <a:ext cx="1062990" cy="240030"/>
-          </a:xfrm>
-          <a:prstGeom prst="rect">
-            <a:avLst/>
-          </a:prstGeom>
-          <a:noFill/>
-          <a:ln/>
-        </p:spPr>
-        <p:txBody>
-          <a:bodyPr wrap="square" rtlCol="0" anchor="ctr"/>
-          <a:lstStyle/>
-          <a:p>
-            <a:pPr algn="ctr"/>
-            <a:r>
-              <a:rPr lang="en-US" sz="825" b="1" dirty="0">
-                <a:solidFill>
-                  <a:srgbClr val="0F172A"/>
-                </a:solidFill>
-              </a:rPr>
-              <a:t>dbt Cloud</a:t>
-            </a:r>
-            <a:endParaRPr lang="en-US" sz="825" dirty="0"/>
-          </a:p>
-        </p:txBody>
-      </p:sp>
-      <p:sp>
-        <p:nvSpPr>
-          <p:cNvPr id="41" name="Text 39"/>
-          <p:cNvSpPr/>
-          <p:nvPr/>
-        </p:nvSpPr>
-        <p:spPr>
-          <a:xfrm>
-            <a:off x="6467094" y="1920240"/>
-            <a:ext cx="1062990" cy="342900"/>
-          </a:xfrm>
-          <a:prstGeom prst="rect">
-            <a:avLst/>
-          </a:prstGeom>
-          <a:noFill/>
-          <a:ln/>
-        </p:spPr>
-        <p:txBody>
-          <a:bodyPr wrap="square" rtlCol="0" anchor="ctr"/>
-          <a:lstStyle/>
-          <a:p>
-            <a:pPr algn="ctr"/>
-            <a:r>
-              <a:rPr lang="en-US" sz="675" b="1" dirty="0">
-                <a:solidFill>
-                  <a:srgbClr val="B45309"/>
-                </a:solidFill>
-              </a:rPr>
-              <a:t>Transform + tests</a:t>
-            </a:r>
-            <a:endParaRPr lang="en-US" sz="675" dirty="0"/>
-          </a:p>
-        </p:txBody>
-      </p:sp>
-      <p:sp>
-        <p:nvSpPr>
-          <p:cNvPr id="42" name="Text 40"/>
-          <p:cNvSpPr/>
-          <p:nvPr/>
-        </p:nvSpPr>
-        <p:spPr>
-          <a:xfrm>
-            <a:off x="7536942" y="1645920"/>
-            <a:ext cx="137160" cy="274320"/>
-          </a:xfrm>
-          <a:prstGeom prst="rect">
-            <a:avLst/>
-          </a:prstGeom>
-          <a:noFill/>
-          <a:ln/>
-        </p:spPr>
-        <p:txBody>
-          <a:bodyPr wrap="square" rtlCol="0" anchor="ctr"/>
-          <a:lstStyle/>
-          <a:p>
-            <a:pPr algn="ctr"/>
-            <a:r>
-              <a:rPr lang="en-US" sz="1500" b="1" dirty="0">
-                <a:solidFill>
-                  <a:srgbClr val="0891B2"/>
-                </a:solidFill>
-              </a:rPr>
-              <a:t>→</a:t>
-            </a:r>
-            <a:endParaRPr lang="en-US" sz="1500" dirty="0"/>
-          </a:p>
-        </p:txBody>
-      </p:sp>
-      <p:sp>
-        <p:nvSpPr>
-          <p:cNvPr id="43" name="Shape 41"/>
-          <p:cNvSpPr/>
-          <p:nvPr/>
-        </p:nvSpPr>
-        <p:spPr>
-          <a:xfrm>
-            <a:off x="7680960" y="1165860"/>
-            <a:ext cx="1062990" cy="1165860"/>
-          </a:xfrm>
-          <a:prstGeom prst="roundRect">
-            <a:avLst>
-              <a:gd name="adj" fmla="val 5161"/>
-            </a:avLst>
-          </a:prstGeom>
-          <a:solidFill>
-            <a:srgbClr val="FEF3C7"/>
-          </a:solidFill>
-          <a:ln w="25400">
-            <a:solidFill>
-              <a:srgbClr val="F59E0B"/>
-            </a:solidFill>
-            <a:prstDash val="solid"/>
-          </a:ln>
-        </p:spPr>
-      </p:sp>
-      <p:sp>
-        <p:nvSpPr>
-          <p:cNvPr id="44" name="Text 42"/>
-          <p:cNvSpPr/>
-          <p:nvPr/>
-        </p:nvSpPr>
-        <p:spPr>
-          <a:xfrm>
-            <a:off x="8538210" y="1179576"/>
-            <a:ext cx="171450" cy="137160"/>
-          </a:xfrm>
-          <a:prstGeom prst="rect">
-            <a:avLst/>
-          </a:prstGeom>
-          <a:noFill/>
-          <a:ln/>
-        </p:spPr>
-        <p:txBody>
-          <a:bodyPr wrap="square" rtlCol="0" anchor="ctr"/>
-          <a:lstStyle/>
-          <a:p>
-            <a:pPr algn="r"/>
-            <a:r>
-              <a:rPr lang="en-US" sz="675" dirty="0">
-                <a:solidFill>
-                  <a:srgbClr val="64748B"/>
-                </a:solidFill>
-              </a:rPr>
-              <a:t>7</a:t>
-            </a:r>
-            <a:endParaRPr lang="en-US" sz="675" dirty="0"/>
-          </a:p>
-        </p:txBody>
-      </p:sp>
-      <p:sp>
-        <p:nvSpPr>
-          <p:cNvPr id="45" name="Text 43"/>
-          <p:cNvSpPr/>
-          <p:nvPr/>
-        </p:nvSpPr>
-        <p:spPr>
-          <a:xfrm>
-            <a:off x="7680960" y="1268730"/>
-            <a:ext cx="1062990" cy="342900"/>
-          </a:xfrm>
-          <a:prstGeom prst="rect">
-            <a:avLst/>
-          </a:prstGeom>
-          <a:noFill/>
-          <a:ln/>
-        </p:spPr>
-        <p:txBody>
-          <a:bodyPr wrap="square" rtlCol="0" anchor="ctr"/>
-          <a:lstStyle/>
-          <a:p>
-            <a:pPr algn="ctr"/>
-            <a:r>
-              <a:rPr lang="en-US" dirty="0">
-                <a:solidFill>
-                  <a:srgbClr val="000000"/>
-                </a:solidFill>
-              </a:rPr>
-              <a:t>📊</a:t>
-            </a:r>
-            <a:endParaRPr lang="en-US" dirty="0"/>
-          </a:p>
-        </p:txBody>
-      </p:sp>
-      <p:sp>
-        <p:nvSpPr>
-          <p:cNvPr id="46" name="Text 44"/>
-          <p:cNvSpPr/>
-          <p:nvPr/>
-        </p:nvSpPr>
-        <p:spPr>
-          <a:xfrm>
-            <a:off x="7680960" y="1680210"/>
-            <a:ext cx="1062990" cy="240030"/>
-          </a:xfrm>
-          <a:prstGeom prst="rect">
-            <a:avLst/>
-          </a:prstGeom>
-          <a:noFill/>
-          <a:ln/>
-        </p:spPr>
-        <p:txBody>
-          <a:bodyPr wrap="square" rtlCol="0" anchor="ctr"/>
-          <a:lstStyle/>
-          <a:p>
-            <a:pPr algn="ctr"/>
-            <a:r>
-              <a:rPr lang="en-US" sz="825" b="1" dirty="0">
-                <a:solidFill>
-                  <a:srgbClr val="0F172A"/>
-                </a:solidFill>
-              </a:rPr>
-              <a:t>Power BI</a:t>
-            </a:r>
-            <a:endParaRPr lang="en-US" sz="825" dirty="0"/>
-          </a:p>
-        </p:txBody>
-      </p:sp>
-      <p:sp>
-        <p:nvSpPr>
-          <p:cNvPr id="47" name="Text 45"/>
-          <p:cNvSpPr/>
-          <p:nvPr/>
-        </p:nvSpPr>
-        <p:spPr>
-          <a:xfrm>
-            <a:off x="7680960" y="1920240"/>
-            <a:ext cx="1062990" cy="342900"/>
-          </a:xfrm>
-          <a:prstGeom prst="rect">
-            <a:avLst/>
-          </a:prstGeom>
-          <a:noFill/>
-          <a:ln/>
-        </p:spPr>
-        <p:txBody>
-          <a:bodyPr wrap="square" rtlCol="0" anchor="ctr"/>
-          <a:lstStyle/>
-          <a:p>
-            <a:pPr algn="ctr"/>
-            <a:r>
-              <a:rPr lang="en-US" sz="675" b="1" dirty="0">
-                <a:solidFill>
-                  <a:srgbClr val="B45309"/>
-                </a:solidFill>
-              </a:rPr>
-              <a:t>Dashboard</a:t>
-            </a:r>
-            <a:endParaRPr lang="en-US" sz="675" dirty="0"/>
-          </a:p>
-        </p:txBody>
-      </p:sp>
-      <p:sp>
-        <p:nvSpPr>
-          <p:cNvPr id="48" name="Shape 46"/>
-          <p:cNvSpPr/>
-          <p:nvPr/>
-        </p:nvSpPr>
-        <p:spPr>
-          <a:xfrm>
-            <a:off x="274320" y="2537460"/>
-            <a:ext cx="8572500" cy="377190"/>
-          </a:xfrm>
-          <a:prstGeom prst="roundRect">
-            <a:avLst>
-              <a:gd name="adj" fmla="val 14545"/>
-            </a:avLst>
-          </a:prstGeom>
-          <a:solidFill>
-            <a:srgbClr val="FAE8FF"/>
-          </a:solidFill>
-          <a:ln w="12700">
-            <a:solidFill>
-              <a:srgbClr val="D946EF"/>
-            </a:solidFill>
-            <a:prstDash val="solid"/>
-          </a:ln>
-        </p:spPr>
-      </p:sp>
-      <p:sp>
-        <p:nvSpPr>
-          <p:cNvPr id="49" name="Text 47"/>
-          <p:cNvSpPr/>
-          <p:nvPr/>
-        </p:nvSpPr>
-        <p:spPr>
-          <a:xfrm>
-            <a:off x="274320" y="2537460"/>
-            <a:ext cx="8572500" cy="377190"/>
-          </a:xfrm>
-          <a:prstGeom prst="rect">
-            <a:avLst/>
-          </a:prstGeom>
-          <a:noFill/>
-          <a:ln/>
-        </p:spPr>
-        <p:txBody>
-          <a:bodyPr wrap="square" rtlCol="0" anchor="ctr"/>
-          <a:lstStyle/>
-          <a:p>
-            <a:pPr algn="ctr"/>
-            <a:r>
-              <a:rPr lang="en-US" sz="900" b="1" dirty="0">
-                <a:solidFill>
-                  <a:srgbClr val="000000"/>
-                </a:solidFill>
-              </a:rPr>
-              <a:t>❄  ⇆  📊   </a:t>
-            </a:r>
-            <a:r>
-              <a:rPr lang="en-US" sz="900" b="1" dirty="0">
-                <a:solidFill>
-                  <a:srgbClr val="1E293B"/>
-                </a:solidFill>
-              </a:rPr>
-              <a:t>Power BI connects directly to Snowflake </a:t>
-            </a:r>
-            <a:r>
-              <a:rPr lang="en-US" sz="900" dirty="0">
-                <a:solidFill>
-                  <a:srgbClr val="475569"/>
-                </a:solidFill>
-              </a:rPr>
-              <a:t>— reads Gold-layer tables for reporting</a:t>
-            </a:r>
-            <a:endParaRPr lang="en-US" sz="900" dirty="0"/>
-          </a:p>
-        </p:txBody>
-      </p:sp>
-      <p:sp>
-        <p:nvSpPr>
-          <p:cNvPr id="50" name="Shape 48"/>
-          <p:cNvSpPr/>
-          <p:nvPr/>
-        </p:nvSpPr>
-        <p:spPr>
-          <a:xfrm>
-            <a:off x="274320" y="3017520"/>
-            <a:ext cx="8572500" cy="342900"/>
-          </a:xfrm>
-          <a:prstGeom prst="roundRect">
-            <a:avLst>
-              <a:gd name="adj" fmla="val 12000"/>
-            </a:avLst>
-          </a:prstGeom>
-          <a:solidFill>
-            <a:srgbClr val="F1F5F9"/>
-          </a:solidFill>
-          <a:ln w="12700">
-            <a:solidFill>
-              <a:srgbClr val="CBD5E1"/>
-            </a:solidFill>
-            <a:prstDash val="solid"/>
-          </a:ln>
-        </p:spPr>
-      </p:sp>
-      <p:sp>
-        <p:nvSpPr>
-          <p:cNvPr id="51" name="Text 49"/>
-          <p:cNvSpPr/>
-          <p:nvPr/>
-        </p:nvSpPr>
-        <p:spPr>
-          <a:xfrm>
-            <a:off x="274320" y="3017520"/>
-            <a:ext cx="8572500" cy="342900"/>
-          </a:xfrm>
-          <a:prstGeom prst="rect">
-            <a:avLst/>
-          </a:prstGeom>
-          <a:noFill/>
-          <a:ln/>
-        </p:spPr>
-        <p:txBody>
-          <a:bodyPr wrap="square" rtlCol="0" anchor="ctr"/>
-          <a:lstStyle/>
-          <a:p>
-            <a:pPr algn="ctr"/>
-            <a:r>
-              <a:rPr lang="en-US" sz="825" b="1" dirty="0">
-                <a:solidFill>
-                  <a:srgbClr val="334155"/>
-                </a:solidFill>
-              </a:rPr>
-              <a:t>Why batch? </a:t>
-            </a:r>
-            <a:r>
-              <a:rPr lang="en-US" sz="825" dirty="0">
-                <a:solidFill>
-                  <a:srgbClr val="64748B"/>
-                </a:solidFill>
-              </a:rPr>
-              <a:t>— Static stop data updates once daily. Scheduled batch ingestion is efficient, cost-effective and aligned with Trafiklab's update frequency.</a:t>
-            </a:r>
-            <a:endParaRPr lang="en-US" sz="825" dirty="0"/>
-          </a:p>
-        </p:txBody>
-      </p:sp>
-      <p:sp>
-        <p:nvSpPr>
-          <p:cNvPr id="52" name="Shape 50"/>
-          <p:cNvSpPr/>
-          <p:nvPr/>
-        </p:nvSpPr>
-        <p:spPr>
-          <a:xfrm>
-            <a:off x="274320" y="3463290"/>
-            <a:ext cx="8572500" cy="1543050"/>
-          </a:xfrm>
-          <a:prstGeom prst="roundRect">
-            <a:avLst>
-              <a:gd name="adj" fmla="val 3556"/>
-            </a:avLst>
+            <a:pPr marL="0" indent="0">
+              <a:buNone/>
+            </a:pPr>
+            <a:r>
+              <a:rPr lang="en-US" sz="1400" b="1" dirty="0">
+                <a:solidFill>
+                  <a:srgbClr val="00B4D8"/>
+                </a:solidFill>
+              </a:rPr>
+              <a:t>Analytical Question: </a:t>
+            </a:r>
+            <a:r>
+              <a:rPr lang="en-US" sz="1400" dirty="0">
+                <a:solidFill>
+                  <a:srgbClr val="FFFFFF"/>
+                </a:solidFill>
+              </a:rPr>
+              <a:t>How is Stockholm's public transport network distributed across the city and which stops are busiest?</a:t>
+            </a:r>
+            <a:endParaRPr lang="en-US" sz="1400" dirty="0"/>
+          </a:p>
+        </p:txBody>
+      </p:sp>
+      <p:sp>
+        <p:nvSpPr>
+          <p:cNvPr id="7" name="Shape 5"/>
+          <p:cNvSpPr/>
+          <p:nvPr/>
+        </p:nvSpPr>
+        <p:spPr>
+          <a:xfrm>
+            <a:off x="365760" y="2103120"/>
+            <a:ext cx="1965960" cy="1417320"/>
+          </a:xfrm>
+          <a:prstGeom prst="rect">
+            <a:avLst/>
           </a:prstGeom>
           <a:solidFill>
             <a:srgbClr val="FFFFFF"/>
           </a:solidFill>
           <a:ln w="12700">
             <a:solidFill>
-              <a:srgbClr val="E2E8F0"/>
+              <a:srgbClr val="D0DCE8"/>
             </a:solidFill>
             <a:prstDash val="solid"/>
           </a:ln>
-        </p:spPr>
-      </p:sp>
-      <p:sp>
-        <p:nvSpPr>
-          <p:cNvPr id="53" name="Text 51"/>
-          <p:cNvSpPr/>
-          <p:nvPr/>
-        </p:nvSpPr>
-        <p:spPr>
-          <a:xfrm>
-            <a:off x="411480" y="3511296"/>
-            <a:ext cx="8229600" cy="240030"/>
-          </a:xfrm>
-          <a:prstGeom prst="rect">
-            <a:avLst/>
-          </a:prstGeom>
-          <a:noFill/>
-          <a:ln/>
-        </p:spPr>
-        <p:txBody>
-          <a:bodyPr wrap="square" rtlCol="0" anchor="ctr"/>
-          <a:lstStyle/>
-          <a:p>
-            <a:r>
-              <a:rPr lang="en-US" sz="1050" b="1" dirty="0">
-                <a:solidFill>
-                  <a:srgbClr val="0E7490"/>
-                </a:solidFill>
-              </a:rPr>
-              <a:t>Architectural Decisions</a:t>
-            </a:r>
-            <a:endParaRPr lang="en-US" sz="1050" dirty="0"/>
-          </a:p>
-        </p:txBody>
-      </p:sp>
-      <p:sp>
-        <p:nvSpPr>
-          <p:cNvPr id="54" name="Text 52"/>
-          <p:cNvSpPr/>
-          <p:nvPr/>
-        </p:nvSpPr>
-        <p:spPr>
-          <a:xfrm>
-            <a:off x="411480" y="3806190"/>
-            <a:ext cx="240030" cy="274320"/>
-          </a:xfrm>
-          <a:prstGeom prst="rect">
-            <a:avLst/>
-          </a:prstGeom>
-          <a:noFill/>
-          <a:ln/>
-        </p:spPr>
-        <p:txBody>
-          <a:bodyPr wrap="square" rtlCol="0" anchor="ctr"/>
-          <a:lstStyle/>
-          <a:p>
-            <a:r>
-              <a:rPr lang="en-US" sz="1050" dirty="0">
-                <a:solidFill>
-                  <a:srgbClr val="D97706"/>
-                </a:solidFill>
-              </a:rPr>
-              <a:t>🔒</a:t>
-            </a:r>
-            <a:endParaRPr lang="en-US" sz="1050" dirty="0"/>
-          </a:p>
-        </p:txBody>
-      </p:sp>
-      <p:sp>
-        <p:nvSpPr>
-          <p:cNvPr id="55" name="Text 53"/>
-          <p:cNvSpPr/>
-          <p:nvPr/>
-        </p:nvSpPr>
-        <p:spPr>
-          <a:xfrm>
-            <a:off x="685800" y="3806190"/>
-            <a:ext cx="3840480" cy="480060"/>
-          </a:xfrm>
-          <a:prstGeom prst="rect">
-            <a:avLst/>
-          </a:prstGeom>
-          <a:noFill/>
-          <a:ln/>
-        </p:spPr>
-        <p:txBody>
-          <a:bodyPr wrap="square" rtlCol="0" anchor="t"/>
-          <a:lstStyle/>
-          <a:p>
-            <a:r>
-              <a:rPr lang="en-US" sz="750" b="1" dirty="0">
-                <a:solidFill>
-                  <a:srgbClr val="0F172A"/>
-                </a:solidFill>
-              </a:rPr>
-              <a:t>Key Vault </a:t>
-            </a:r>
-            <a:r>
-              <a:rPr lang="en-US" sz="750" dirty="0">
-                <a:solidFill>
-                  <a:srgbClr val="475569"/>
-                </a:solidFill>
-              </a:rPr>
-              <a:t>— all credentials stored centrally, never hardcoded in any script or pipeline</a:t>
-            </a:r>
-            <a:endParaRPr lang="en-US" sz="750" dirty="0"/>
-          </a:p>
-        </p:txBody>
-      </p:sp>
-      <p:sp>
-        <p:nvSpPr>
-          <p:cNvPr id="56" name="Text 54"/>
-          <p:cNvSpPr/>
-          <p:nvPr/>
-        </p:nvSpPr>
-        <p:spPr>
-          <a:xfrm>
-            <a:off x="4629150" y="3806190"/>
-            <a:ext cx="240030" cy="274320"/>
-          </a:xfrm>
-          <a:prstGeom prst="rect">
-            <a:avLst/>
-          </a:prstGeom>
-          <a:noFill/>
-          <a:ln/>
-        </p:spPr>
-        <p:txBody>
-          <a:bodyPr wrap="square" rtlCol="0" anchor="ctr"/>
-          <a:lstStyle/>
-          <a:p>
-            <a:r>
-              <a:rPr lang="en-US" sz="1050" dirty="0">
-                <a:solidFill>
-                  <a:srgbClr val="0284C7"/>
-                </a:solidFill>
-              </a:rPr>
-              <a:t>❄</a:t>
-            </a:r>
-            <a:endParaRPr lang="en-US" sz="1050" dirty="0"/>
-          </a:p>
-        </p:txBody>
-      </p:sp>
-      <p:sp>
-        <p:nvSpPr>
-          <p:cNvPr id="57" name="Text 55"/>
-          <p:cNvSpPr/>
-          <p:nvPr/>
-        </p:nvSpPr>
-        <p:spPr>
-          <a:xfrm>
-            <a:off x="4903470" y="3806190"/>
-            <a:ext cx="3840480" cy="480060"/>
-          </a:xfrm>
-          <a:prstGeom prst="rect">
-            <a:avLst/>
-          </a:prstGeom>
-          <a:noFill/>
-          <a:ln/>
-        </p:spPr>
-        <p:txBody>
-          <a:bodyPr wrap="square" rtlCol="0" anchor="t"/>
-          <a:lstStyle/>
-          <a:p>
-            <a:r>
-              <a:rPr lang="en-US" sz="750" b="1" dirty="0">
-                <a:solidFill>
-                  <a:srgbClr val="0F172A"/>
-                </a:solidFill>
-              </a:rPr>
-              <a:t>Snowflake medallion </a:t>
-            </a:r>
-            <a:r>
-              <a:rPr lang="en-US" sz="750" dirty="0">
-                <a:solidFill>
-                  <a:srgbClr val="475569"/>
-                </a:solidFill>
-              </a:rPr>
-              <a:t>— bronze → silver → gold ensures data gets cleaner and more valuable at each step</a:t>
-            </a:r>
-            <a:endParaRPr lang="en-US" sz="750" dirty="0"/>
-          </a:p>
-        </p:txBody>
-      </p:sp>
-      <p:sp>
-        <p:nvSpPr>
-          <p:cNvPr id="58" name="Text 56"/>
-          <p:cNvSpPr/>
-          <p:nvPr/>
-        </p:nvSpPr>
-        <p:spPr>
-          <a:xfrm>
-            <a:off x="411480" y="4354830"/>
-            <a:ext cx="240030" cy="274320"/>
-          </a:xfrm>
-          <a:prstGeom prst="rect">
-            <a:avLst/>
-          </a:prstGeom>
-          <a:noFill/>
-          <a:ln/>
-        </p:spPr>
-        <p:txBody>
-          <a:bodyPr wrap="square" rtlCol="0" anchor="ctr"/>
-          <a:lstStyle/>
-          <a:p>
-            <a:r>
-              <a:rPr lang="en-US" sz="1050" dirty="0">
-                <a:solidFill>
-                  <a:srgbClr val="1D4ED8"/>
-                </a:solidFill>
-              </a:rPr>
-              <a:t>💾</a:t>
-            </a:r>
-            <a:endParaRPr lang="en-US" sz="1050" dirty="0"/>
-          </a:p>
-        </p:txBody>
-      </p:sp>
-      <p:sp>
-        <p:nvSpPr>
-          <p:cNvPr id="59" name="Text 57"/>
-          <p:cNvSpPr/>
-          <p:nvPr/>
-        </p:nvSpPr>
-        <p:spPr>
-          <a:xfrm>
-            <a:off x="685800" y="4354830"/>
-            <a:ext cx="3840480" cy="480060"/>
-          </a:xfrm>
-          <a:prstGeom prst="rect">
-            <a:avLst/>
-          </a:prstGeom>
-          <a:noFill/>
-          <a:ln/>
-        </p:spPr>
-        <p:txBody>
-          <a:bodyPr wrap="square" rtlCol="0" anchor="t"/>
-          <a:lstStyle/>
-          <a:p>
-            <a:r>
-              <a:rPr lang="en-US" sz="750" b="1" dirty="0">
-                <a:solidFill>
-                  <a:srgbClr val="0F172A"/>
-                </a:solidFill>
-              </a:rPr>
-              <a:t>ADLS Gen2 </a:t>
-            </a:r>
-            <a:r>
-              <a:rPr lang="en-US" sz="750" dirty="0">
-                <a:solidFill>
-                  <a:srgbClr val="475569"/>
-                </a:solidFill>
-              </a:rPr>
-              <a:t>— raw data preserved in bronze layer; safe to reprocess if anything goes wrong downstream</a:t>
-            </a:r>
-            <a:endParaRPr lang="en-US" sz="750" dirty="0"/>
-          </a:p>
-        </p:txBody>
-      </p:sp>
-      <p:sp>
-        <p:nvSpPr>
-          <p:cNvPr id="60" name="Text 58"/>
-          <p:cNvSpPr/>
-          <p:nvPr/>
-        </p:nvSpPr>
-        <p:spPr>
-          <a:xfrm>
-            <a:off x="4629150" y="4354830"/>
-            <a:ext cx="240030" cy="274320"/>
-          </a:xfrm>
-          <a:prstGeom prst="rect">
-            <a:avLst/>
-          </a:prstGeom>
-          <a:noFill/>
-          <a:ln/>
-        </p:spPr>
-        <p:txBody>
-          <a:bodyPr wrap="square" rtlCol="0" anchor="ctr"/>
-          <a:lstStyle/>
-          <a:p>
-            <a:r>
-              <a:rPr lang="en-US" sz="1050" dirty="0">
-                <a:solidFill>
-                  <a:srgbClr val="B45309"/>
-                </a:solidFill>
-              </a:rPr>
-              <a:t>🔧</a:t>
-            </a:r>
-            <a:endParaRPr lang="en-US" sz="1050" dirty="0"/>
-          </a:p>
-        </p:txBody>
-      </p:sp>
-      <p:sp>
-        <p:nvSpPr>
-          <p:cNvPr id="61" name="Text 59"/>
-          <p:cNvSpPr/>
-          <p:nvPr/>
-        </p:nvSpPr>
-        <p:spPr>
-          <a:xfrm>
-            <a:off x="4903470" y="4354830"/>
-            <a:ext cx="3840480" cy="480060"/>
-          </a:xfrm>
-          <a:prstGeom prst="rect">
-            <a:avLst/>
-          </a:prstGeom>
-          <a:noFill/>
-          <a:ln/>
-        </p:spPr>
-        <p:txBody>
-          <a:bodyPr wrap="square" rtlCol="0" anchor="t"/>
-          <a:lstStyle/>
-          <a:p>
-            <a:r>
-              <a:rPr lang="en-US" sz="750" b="1" dirty="0">
-                <a:solidFill>
-                  <a:srgbClr val="0F172A"/>
-                </a:solidFill>
-              </a:rPr>
-              <a:t>dbt tests </a:t>
-            </a:r>
-            <a:r>
-              <a:rPr lang="en-US" sz="750" dirty="0">
-                <a:solidFill>
-                  <a:srgbClr val="475569"/>
-                </a:solidFill>
-              </a:rPr>
-              <a:t>— not_null and unique constraints catch bad data before it ever reaches Power BI</a:t>
-            </a:r>
-            <a:endParaRPr lang="en-US" sz="750" dirty="0"/>
+          <a:effectLst>
+            <a:outerShdw blurRad="76200" dist="25400" dir="8100000" algn="bl" rotWithShape="0">
+              <a:srgbClr val="000000">
+                <a:alpha val="8000"/>
+              </a:srgbClr>
+            </a:outerShdw>
+          </a:effectLst>
+        </p:spPr>
+      </p:sp>
+      <p:sp>
+        <p:nvSpPr>
+          <p:cNvPr id="8" name="Shape 6"/>
+          <p:cNvSpPr/>
+          <p:nvPr/>
+        </p:nvSpPr>
+        <p:spPr>
+          <a:xfrm>
+            <a:off x="365760" y="2103120"/>
+            <a:ext cx="1965960" cy="64008"/>
+          </a:xfrm>
+          <a:prstGeom prst="rect">
+            <a:avLst/>
+          </a:prstGeom>
+          <a:solidFill>
+            <a:srgbClr val="00B4D8"/>
+          </a:solidFill>
+          <a:ln w="12700">
+            <a:solidFill>
+              <a:srgbClr val="00B4D8"/>
+            </a:solidFill>
+            <a:prstDash val="solid"/>
+          </a:ln>
+        </p:spPr>
+      </p:sp>
+      <p:sp>
+        <p:nvSpPr>
+          <p:cNvPr id="9" name="Text 7"/>
+          <p:cNvSpPr/>
+          <p:nvPr/>
+        </p:nvSpPr>
+        <p:spPr>
+          <a:xfrm>
+            <a:off x="365760" y="2194560"/>
+            <a:ext cx="1965960" cy="457200"/>
+          </a:xfrm>
+          <a:prstGeom prst="rect">
+            <a:avLst/>
+          </a:prstGeom>
+          <a:noFill/>
+          <a:ln/>
+        </p:spPr>
+        <p:txBody>
+          <a:bodyPr wrap="square" lIns="0" tIns="0" rIns="0" bIns="0" rtlCol="0" anchor="ctr"/>
+          <a:lstStyle/>
+          <a:p>
+            <a:pPr marL="0" indent="0" algn="ctr">
+              <a:buNone/>
+            </a:pPr>
+            <a:r>
+              <a:rPr lang="en-US" sz="2200" dirty="0">
+                <a:solidFill>
+                  <a:srgbClr val="000000"/>
+                </a:solidFill>
+              </a:rPr>
+              <a:t>📍</a:t>
+            </a:r>
+            <a:endParaRPr lang="en-US" sz="2200" dirty="0"/>
+          </a:p>
+        </p:txBody>
+      </p:sp>
+      <p:sp>
+        <p:nvSpPr>
+          <p:cNvPr id="10" name="Text 8"/>
+          <p:cNvSpPr/>
+          <p:nvPr/>
+        </p:nvSpPr>
+        <p:spPr>
+          <a:xfrm>
+            <a:off x="365760" y="2633472"/>
+            <a:ext cx="1965960" cy="457200"/>
+          </a:xfrm>
+          <a:prstGeom prst="rect">
+            <a:avLst/>
+          </a:prstGeom>
+          <a:noFill/>
+          <a:ln/>
+        </p:spPr>
+        <p:txBody>
+          <a:bodyPr wrap="square" lIns="0" tIns="0" rIns="0" bIns="0" rtlCol="0" anchor="ctr"/>
+          <a:lstStyle/>
+          <a:p>
+            <a:pPr marL="0" indent="0" algn="ctr">
+              <a:buNone/>
+            </a:pPr>
+            <a:r>
+              <a:rPr lang="en-US" sz="2200" b="1" dirty="0">
+                <a:solidFill>
+                  <a:srgbClr val="0D1B2A"/>
+                </a:solidFill>
+              </a:rPr>
+              <a:t>21,829</a:t>
+            </a:r>
+            <a:endParaRPr lang="en-US" sz="2200" dirty="0"/>
+          </a:p>
+        </p:txBody>
+      </p:sp>
+      <p:sp>
+        <p:nvSpPr>
+          <p:cNvPr id="11" name="Text 9"/>
+          <p:cNvSpPr/>
+          <p:nvPr/>
+        </p:nvSpPr>
+        <p:spPr>
+          <a:xfrm>
+            <a:off x="365760" y="3063240"/>
+            <a:ext cx="1965960" cy="347472"/>
+          </a:xfrm>
+          <a:prstGeom prst="rect">
+            <a:avLst/>
+          </a:prstGeom>
+          <a:noFill/>
+          <a:ln/>
+        </p:spPr>
+        <p:txBody>
+          <a:bodyPr wrap="square" lIns="0" tIns="0" rIns="0" bIns="0" rtlCol="0" anchor="ctr"/>
+          <a:lstStyle/>
+          <a:p>
+            <a:pPr marL="0" indent="0" algn="ctr">
+              <a:buNone/>
+            </a:pPr>
+            <a:r>
+              <a:rPr lang="en-US" sz="1000" dirty="0">
+                <a:solidFill>
+                  <a:srgbClr val="8FA3B1"/>
+                </a:solidFill>
+              </a:rPr>
+              <a:t>Transport Stops</a:t>
+            </a:r>
+            <a:endParaRPr lang="en-US" sz="1000" dirty="0"/>
+          </a:p>
+        </p:txBody>
+      </p:sp>
+      <p:sp>
+        <p:nvSpPr>
+          <p:cNvPr id="12" name="Shape 10"/>
+          <p:cNvSpPr/>
+          <p:nvPr/>
+        </p:nvSpPr>
+        <p:spPr>
+          <a:xfrm>
+            <a:off x="2514600" y="2103120"/>
+            <a:ext cx="1965960" cy="1417320"/>
+          </a:xfrm>
+          <a:prstGeom prst="rect">
+            <a:avLst/>
+          </a:prstGeom>
+          <a:solidFill>
+            <a:srgbClr val="FFFFFF"/>
+          </a:solidFill>
+          <a:ln w="12700">
+            <a:solidFill>
+              <a:srgbClr val="D0DCE8"/>
+            </a:solidFill>
+            <a:prstDash val="solid"/>
+          </a:ln>
+          <a:effectLst>
+            <a:outerShdw blurRad="76200" dist="25400" dir="8100000" algn="bl" rotWithShape="0">
+              <a:srgbClr val="000000">
+                <a:alpha val="8000"/>
+              </a:srgbClr>
+            </a:outerShdw>
+          </a:effectLst>
+        </p:spPr>
+      </p:sp>
+      <p:sp>
+        <p:nvSpPr>
+          <p:cNvPr id="13" name="Shape 11"/>
+          <p:cNvSpPr/>
+          <p:nvPr/>
+        </p:nvSpPr>
+        <p:spPr>
+          <a:xfrm>
+            <a:off x="2514600" y="2103120"/>
+            <a:ext cx="1965960" cy="64008"/>
+          </a:xfrm>
+          <a:prstGeom prst="rect">
+            <a:avLst/>
+          </a:prstGeom>
+          <a:solidFill>
+            <a:srgbClr val="00B4D8"/>
+          </a:solidFill>
+          <a:ln w="12700">
+            <a:solidFill>
+              <a:srgbClr val="00B4D8"/>
+            </a:solidFill>
+            <a:prstDash val="solid"/>
+          </a:ln>
+        </p:spPr>
+      </p:sp>
+      <p:sp>
+        <p:nvSpPr>
+          <p:cNvPr id="14" name="Text 12"/>
+          <p:cNvSpPr/>
+          <p:nvPr/>
+        </p:nvSpPr>
+        <p:spPr>
+          <a:xfrm>
+            <a:off x="2514600" y="2194560"/>
+            <a:ext cx="1965960" cy="457200"/>
+          </a:xfrm>
+          <a:prstGeom prst="rect">
+            <a:avLst/>
+          </a:prstGeom>
+          <a:noFill/>
+          <a:ln/>
+        </p:spPr>
+        <p:txBody>
+          <a:bodyPr wrap="square" lIns="0" tIns="0" rIns="0" bIns="0" rtlCol="0" anchor="ctr"/>
+          <a:lstStyle/>
+          <a:p>
+            <a:pPr marL="0" indent="0" algn="ctr">
+              <a:buNone/>
+            </a:pPr>
+            <a:r>
+              <a:rPr lang="en-US" sz="2200" dirty="0">
+                <a:solidFill>
+                  <a:srgbClr val="000000"/>
+                </a:solidFill>
+              </a:rPr>
+              <a:t>🚌</a:t>
+            </a:r>
+            <a:endParaRPr lang="en-US" sz="2200" dirty="0"/>
+          </a:p>
+        </p:txBody>
+      </p:sp>
+      <p:sp>
+        <p:nvSpPr>
+          <p:cNvPr id="15" name="Text 13"/>
+          <p:cNvSpPr/>
+          <p:nvPr/>
+        </p:nvSpPr>
+        <p:spPr>
+          <a:xfrm>
+            <a:off x="2514600" y="2633472"/>
+            <a:ext cx="1965960" cy="457200"/>
+          </a:xfrm>
+          <a:prstGeom prst="rect">
+            <a:avLst/>
+          </a:prstGeom>
+          <a:noFill/>
+          <a:ln/>
+        </p:spPr>
+        <p:txBody>
+          <a:bodyPr wrap="square" lIns="0" tIns="0" rIns="0" bIns="0" rtlCol="0" anchor="ctr"/>
+          <a:lstStyle/>
+          <a:p>
+            <a:pPr marL="0" indent="0" algn="ctr">
+              <a:buNone/>
+            </a:pPr>
+            <a:r>
+              <a:rPr lang="en-US" sz="2200" b="1" dirty="0">
+                <a:solidFill>
+                  <a:srgbClr val="0D1B2A"/>
+                </a:solidFill>
+              </a:rPr>
+              <a:t>614</a:t>
+            </a:r>
+            <a:endParaRPr lang="en-US" sz="2200" dirty="0"/>
+          </a:p>
+        </p:txBody>
+      </p:sp>
+      <p:sp>
+        <p:nvSpPr>
+          <p:cNvPr id="16" name="Text 14"/>
+          <p:cNvSpPr/>
+          <p:nvPr/>
+        </p:nvSpPr>
+        <p:spPr>
+          <a:xfrm>
+            <a:off x="2514600" y="3063240"/>
+            <a:ext cx="1965960" cy="347472"/>
+          </a:xfrm>
+          <a:prstGeom prst="rect">
+            <a:avLst/>
+          </a:prstGeom>
+          <a:noFill/>
+          <a:ln/>
+        </p:spPr>
+        <p:txBody>
+          <a:bodyPr wrap="square" lIns="0" tIns="0" rIns="0" bIns="0" rtlCol="0" anchor="ctr"/>
+          <a:lstStyle/>
+          <a:p>
+            <a:pPr marL="0" indent="0" algn="ctr">
+              <a:buNone/>
+            </a:pPr>
+            <a:r>
+              <a:rPr lang="en-US" sz="1000" dirty="0">
+                <a:solidFill>
+                  <a:srgbClr val="8FA3B1"/>
+                </a:solidFill>
+              </a:rPr>
+              <a:t>Routes</a:t>
+            </a:r>
+            <a:endParaRPr lang="en-US" sz="1000" dirty="0"/>
+          </a:p>
+        </p:txBody>
+      </p:sp>
+      <p:sp>
+        <p:nvSpPr>
+          <p:cNvPr id="17" name="Shape 15"/>
+          <p:cNvSpPr/>
+          <p:nvPr/>
+        </p:nvSpPr>
+        <p:spPr>
+          <a:xfrm>
+            <a:off x="4663440" y="2103120"/>
+            <a:ext cx="1965960" cy="1417320"/>
+          </a:xfrm>
+          <a:prstGeom prst="rect">
+            <a:avLst/>
+          </a:prstGeom>
+          <a:solidFill>
+            <a:srgbClr val="FFFFFF"/>
+          </a:solidFill>
+          <a:ln w="12700">
+            <a:solidFill>
+              <a:srgbClr val="D0DCE8"/>
+            </a:solidFill>
+            <a:prstDash val="solid"/>
+          </a:ln>
+          <a:effectLst>
+            <a:outerShdw blurRad="76200" dist="25400" dir="8100000" algn="bl" rotWithShape="0">
+              <a:srgbClr val="000000">
+                <a:alpha val="8000"/>
+              </a:srgbClr>
+            </a:outerShdw>
+          </a:effectLst>
+        </p:spPr>
+      </p:sp>
+      <p:sp>
+        <p:nvSpPr>
+          <p:cNvPr id="18" name="Shape 16"/>
+          <p:cNvSpPr/>
+          <p:nvPr/>
+        </p:nvSpPr>
+        <p:spPr>
+          <a:xfrm>
+            <a:off x="4663440" y="2103120"/>
+            <a:ext cx="1965960" cy="64008"/>
+          </a:xfrm>
+          <a:prstGeom prst="rect">
+            <a:avLst/>
+          </a:prstGeom>
+          <a:solidFill>
+            <a:srgbClr val="00B4D8"/>
+          </a:solidFill>
+          <a:ln w="12700">
+            <a:solidFill>
+              <a:srgbClr val="00B4D8"/>
+            </a:solidFill>
+            <a:prstDash val="solid"/>
+          </a:ln>
+        </p:spPr>
+      </p:sp>
+      <p:sp>
+        <p:nvSpPr>
+          <p:cNvPr id="19" name="Text 17"/>
+          <p:cNvSpPr/>
+          <p:nvPr/>
+        </p:nvSpPr>
+        <p:spPr>
+          <a:xfrm>
+            <a:off x="4663440" y="2194560"/>
+            <a:ext cx="1965960" cy="457200"/>
+          </a:xfrm>
+          <a:prstGeom prst="rect">
+            <a:avLst/>
+          </a:prstGeom>
+          <a:noFill/>
+          <a:ln/>
+        </p:spPr>
+        <p:txBody>
+          <a:bodyPr wrap="square" lIns="0" tIns="0" rIns="0" bIns="0" rtlCol="0" anchor="ctr"/>
+          <a:lstStyle/>
+          <a:p>
+            <a:pPr marL="0" indent="0" algn="ctr">
+              <a:buNone/>
+            </a:pPr>
+            <a:r>
+              <a:rPr lang="en-US" sz="2200" dirty="0">
+                <a:solidFill>
+                  <a:srgbClr val="000000"/>
+                </a:solidFill>
+              </a:rPr>
+              <a:t>🕐</a:t>
+            </a:r>
+            <a:endParaRPr lang="en-US" sz="2200" dirty="0"/>
+          </a:p>
+        </p:txBody>
+      </p:sp>
+      <p:sp>
+        <p:nvSpPr>
+          <p:cNvPr id="20" name="Text 18"/>
+          <p:cNvSpPr/>
+          <p:nvPr/>
+        </p:nvSpPr>
+        <p:spPr>
+          <a:xfrm>
+            <a:off x="4663440" y="2633472"/>
+            <a:ext cx="1965960" cy="457200"/>
+          </a:xfrm>
+          <a:prstGeom prst="rect">
+            <a:avLst/>
+          </a:prstGeom>
+          <a:noFill/>
+          <a:ln/>
+        </p:spPr>
+        <p:txBody>
+          <a:bodyPr wrap="square" lIns="0" tIns="0" rIns="0" bIns="0" rtlCol="0" anchor="ctr"/>
+          <a:lstStyle/>
+          <a:p>
+            <a:pPr marL="0" indent="0" algn="ctr">
+              <a:buNone/>
+            </a:pPr>
+            <a:r>
+              <a:rPr lang="en-US" sz="2200" b="1" dirty="0">
+                <a:solidFill>
+                  <a:srgbClr val="0D1B2A"/>
+                </a:solidFill>
+              </a:rPr>
+              <a:t>2.78M</a:t>
+            </a:r>
+            <a:endParaRPr lang="en-US" sz="2200" dirty="0"/>
+          </a:p>
+        </p:txBody>
+      </p:sp>
+      <p:sp>
+        <p:nvSpPr>
+          <p:cNvPr id="21" name="Text 19"/>
+          <p:cNvSpPr/>
+          <p:nvPr/>
+        </p:nvSpPr>
+        <p:spPr>
+          <a:xfrm>
+            <a:off x="4663440" y="3063240"/>
+            <a:ext cx="1965960" cy="347472"/>
+          </a:xfrm>
+          <a:prstGeom prst="rect">
+            <a:avLst/>
+          </a:prstGeom>
+          <a:noFill/>
+          <a:ln/>
+        </p:spPr>
+        <p:txBody>
+          <a:bodyPr wrap="square" lIns="0" tIns="0" rIns="0" bIns="0" rtlCol="0" anchor="ctr"/>
+          <a:lstStyle/>
+          <a:p>
+            <a:pPr marL="0" indent="0" algn="ctr">
+              <a:buNone/>
+            </a:pPr>
+            <a:r>
+              <a:rPr lang="en-US" sz="1000" dirty="0">
+                <a:solidFill>
+                  <a:srgbClr val="8FA3B1"/>
+                </a:solidFill>
+              </a:rPr>
+              <a:t>Scheduled Departures</a:t>
+            </a:r>
+            <a:endParaRPr lang="en-US" sz="1000" dirty="0"/>
+          </a:p>
+        </p:txBody>
+      </p:sp>
+      <p:sp>
+        <p:nvSpPr>
+          <p:cNvPr id="22" name="Shape 20"/>
+          <p:cNvSpPr/>
+          <p:nvPr/>
+        </p:nvSpPr>
+        <p:spPr>
+          <a:xfrm>
+            <a:off x="6812280" y="2103120"/>
+            <a:ext cx="1965960" cy="1417320"/>
+          </a:xfrm>
+          <a:prstGeom prst="rect">
+            <a:avLst/>
+          </a:prstGeom>
+          <a:solidFill>
+            <a:srgbClr val="FFFFFF"/>
+          </a:solidFill>
+          <a:ln w="12700">
+            <a:solidFill>
+              <a:srgbClr val="D0DCE8"/>
+            </a:solidFill>
+            <a:prstDash val="solid"/>
+          </a:ln>
+          <a:effectLst>
+            <a:outerShdw blurRad="76200" dist="25400" dir="8100000" algn="bl" rotWithShape="0">
+              <a:srgbClr val="000000">
+                <a:alpha val="8000"/>
+              </a:srgbClr>
+            </a:outerShdw>
+          </a:effectLst>
+        </p:spPr>
+      </p:sp>
+      <p:sp>
+        <p:nvSpPr>
+          <p:cNvPr id="23" name="Shape 21"/>
+          <p:cNvSpPr/>
+          <p:nvPr/>
+        </p:nvSpPr>
+        <p:spPr>
+          <a:xfrm>
+            <a:off x="6812280" y="2103120"/>
+            <a:ext cx="1965960" cy="64008"/>
+          </a:xfrm>
+          <a:prstGeom prst="rect">
+            <a:avLst/>
+          </a:prstGeom>
+          <a:solidFill>
+            <a:srgbClr val="00B4D8"/>
+          </a:solidFill>
+          <a:ln w="12700">
+            <a:solidFill>
+              <a:srgbClr val="00B4D8"/>
+            </a:solidFill>
+            <a:prstDash val="solid"/>
+          </a:ln>
+        </p:spPr>
+      </p:sp>
+      <p:sp>
+        <p:nvSpPr>
+          <p:cNvPr id="24" name="Text 22"/>
+          <p:cNvSpPr/>
+          <p:nvPr/>
+        </p:nvSpPr>
+        <p:spPr>
+          <a:xfrm>
+            <a:off x="6812280" y="2194560"/>
+            <a:ext cx="1965960" cy="457200"/>
+          </a:xfrm>
+          <a:prstGeom prst="rect">
+            <a:avLst/>
+          </a:prstGeom>
+          <a:noFill/>
+          <a:ln/>
+        </p:spPr>
+        <p:txBody>
+          <a:bodyPr wrap="square" lIns="0" tIns="0" rIns="0" bIns="0" rtlCol="0" anchor="ctr"/>
+          <a:lstStyle/>
+          <a:p>
+            <a:pPr marL="0" indent="0" algn="ctr">
+              <a:buNone/>
+            </a:pPr>
+            <a:r>
+              <a:rPr lang="en-US" sz="2200" dirty="0">
+                <a:solidFill>
+                  <a:srgbClr val="000000"/>
+                </a:solidFill>
+              </a:rPr>
+              <a:t>🚇</a:t>
+            </a:r>
+            <a:endParaRPr lang="en-US" sz="2200" dirty="0"/>
+          </a:p>
+        </p:txBody>
+      </p:sp>
+      <p:sp>
+        <p:nvSpPr>
+          <p:cNvPr id="25" name="Text 23"/>
+          <p:cNvSpPr/>
+          <p:nvPr/>
+        </p:nvSpPr>
+        <p:spPr>
+          <a:xfrm>
+            <a:off x="6812280" y="2633472"/>
+            <a:ext cx="1965960" cy="457200"/>
+          </a:xfrm>
+          <a:prstGeom prst="rect">
+            <a:avLst/>
+          </a:prstGeom>
+          <a:noFill/>
+          <a:ln/>
+        </p:spPr>
+        <p:txBody>
+          <a:bodyPr wrap="square" lIns="0" tIns="0" rIns="0" bIns="0" rtlCol="0" anchor="ctr"/>
+          <a:lstStyle/>
+          <a:p>
+            <a:pPr marL="0" indent="0" algn="ctr">
+              <a:buNone/>
+            </a:pPr>
+            <a:r>
+              <a:rPr lang="en-US" sz="2200" b="1" dirty="0">
+                <a:solidFill>
+                  <a:srgbClr val="0D1B2A"/>
+                </a:solidFill>
+              </a:rPr>
+              <a:t>5</a:t>
+            </a:r>
+            <a:endParaRPr lang="en-US" sz="2200" dirty="0"/>
+          </a:p>
+        </p:txBody>
+      </p:sp>
+      <p:sp>
+        <p:nvSpPr>
+          <p:cNvPr id="26" name="Text 24"/>
+          <p:cNvSpPr/>
+          <p:nvPr/>
+        </p:nvSpPr>
+        <p:spPr>
+          <a:xfrm>
+            <a:off x="6812280" y="3063240"/>
+            <a:ext cx="1965960" cy="347472"/>
+          </a:xfrm>
+          <a:prstGeom prst="rect">
+            <a:avLst/>
+          </a:prstGeom>
+          <a:noFill/>
+          <a:ln/>
+        </p:spPr>
+        <p:txBody>
+          <a:bodyPr wrap="square" lIns="0" tIns="0" rIns="0" bIns="0" rtlCol="0" anchor="ctr"/>
+          <a:lstStyle/>
+          <a:p>
+            <a:pPr marL="0" indent="0" algn="ctr">
+              <a:buNone/>
+            </a:pPr>
+            <a:r>
+              <a:rPr lang="en-US" sz="1000" dirty="0">
+                <a:solidFill>
+                  <a:srgbClr val="8FA3B1"/>
+                </a:solidFill>
+              </a:rPr>
+              <a:t>Transport Modes</a:t>
+            </a:r>
+            <a:endParaRPr lang="en-US" sz="1000" dirty="0"/>
+          </a:p>
+        </p:txBody>
+      </p:sp>
+      <p:sp>
+        <p:nvSpPr>
+          <p:cNvPr id="27" name="Shape 25"/>
+          <p:cNvSpPr/>
+          <p:nvPr/>
+        </p:nvSpPr>
+        <p:spPr>
+          <a:xfrm>
+            <a:off x="365760" y="3749040"/>
+            <a:ext cx="8412480" cy="502920"/>
+          </a:xfrm>
+          <a:prstGeom prst="rect">
+            <a:avLst/>
+          </a:prstGeom>
+          <a:solidFill>
+            <a:srgbClr val="E8F4FD"/>
+          </a:solidFill>
+          <a:ln w="12700">
+            <a:solidFill>
+              <a:srgbClr val="90E0EF"/>
+            </a:solidFill>
+            <a:prstDash val="solid"/>
+          </a:ln>
+        </p:spPr>
+      </p:sp>
+      <p:sp>
+        <p:nvSpPr>
+          <p:cNvPr id="28" name="Text 26"/>
+          <p:cNvSpPr/>
+          <p:nvPr/>
+        </p:nvSpPr>
+        <p:spPr>
+          <a:xfrm>
+            <a:off x="457200" y="3749040"/>
+            <a:ext cx="8229600" cy="502920"/>
+          </a:xfrm>
+          <a:prstGeom prst="rect">
+            <a:avLst/>
+          </a:prstGeom>
+          <a:noFill/>
+          <a:ln/>
+        </p:spPr>
+        <p:txBody>
+          <a:bodyPr wrap="square" lIns="0" tIns="0" rIns="0" bIns="0" rtlCol="0" anchor="ctr"/>
+          <a:lstStyle/>
+          <a:p>
+            <a:pPr marL="0" indent="0">
+              <a:buNone/>
+            </a:pPr>
+            <a:r>
+              <a:rPr lang="en-US" sz="1100" dirty="0">
+                <a:solidFill>
+                  <a:srgbClr val="4A6278"/>
+                </a:solidFill>
+              </a:rPr>
+              <a:t>Data Source: Trafiklab (GTFS Regional Static API) — Sweden's official public transport open data platform</a:t>
+            </a:r>
+            <a:endParaRPr lang="en-US" sz="1100" dirty="0"/>
           </a:p>
         </p:txBody>
       </p:sp>
@@ -14060,8 +12937,8 @@
         </p:blipFill>
         <p:spPr>
           <a:xfrm>
-            <a:off x="666118" y="1071463"/>
-            <a:ext cx="7502925" cy="3549476"/>
+            <a:off x="666118" y="853459"/>
+            <a:ext cx="7502925" cy="3991043"/>
           </a:xfrm>
           <a:prstGeom prst="rect">
             <a:avLst/>
@@ -14592,15 +13469,7 @@
 
 <file path=ppt/slides/slide3.xml><?xml version="1.0" encoding="utf-8"?>
 <p:sld xmlns:a="http://schemas.openxmlformats.org/drawingml/2006/main" xmlns:r="http://schemas.openxmlformats.org/officeDocument/2006/relationships" xmlns:p="http://schemas.openxmlformats.org/presentationml/2006/main">
-  <p:cSld name="Slide 2">
-    <p:bg>
-      <p:bgPr>
-        <a:solidFill>
-          <a:srgbClr val="F0F4F8"/>
-        </a:solidFill>
-        <a:effectLst/>
-      </p:bgPr>
-    </p:bg>
+  <p:cSld>
     <p:spTree>
       <p:nvGrpSpPr>
         <p:cNvPr id="1" name=""/>
@@ -14617,24 +13486,93 @@
       </p:grpSpPr>
       <p:sp>
         <p:nvSpPr>
-          <p:cNvPr id="2" name="Shape 0"/>
-          <p:cNvSpPr/>
-          <p:nvPr/>
-        </p:nvSpPr>
-        <p:spPr>
-          <a:xfrm>
-            <a:off x="0" y="0"/>
-            <a:ext cx="9144000" cy="777240"/>
-          </a:xfrm>
-          <a:prstGeom prst="rect">
-            <a:avLst/>
+          <p:cNvPr id="2" name="Text 0"/>
+          <p:cNvSpPr/>
+          <p:nvPr/>
+        </p:nvSpPr>
+        <p:spPr>
+          <a:xfrm>
+            <a:off x="274320" y="171450"/>
+            <a:ext cx="5486400" cy="342900"/>
+          </a:xfrm>
+          <a:prstGeom prst="rect">
+            <a:avLst/>
+          </a:prstGeom>
+          <a:noFill/>
+          <a:ln/>
+        </p:spPr>
+        <p:txBody>
+          <a:bodyPr wrap="square" rtlCol="0" anchor="ctr"/>
+          <a:lstStyle/>
+          <a:p>
+            <a:r>
+              <a:rPr lang="en-US" b="1" dirty="0">
+                <a:solidFill>
+                  <a:srgbClr val="0E7490"/>
+                </a:solidFill>
+              </a:rPr>
+              <a:t>Pipeline Architecture</a:t>
+            </a:r>
+            <a:endParaRPr lang="en-US" dirty="0"/>
+          </a:p>
+        </p:txBody>
+      </p:sp>
+      <p:sp>
+        <p:nvSpPr>
+          <p:cNvPr id="3" name="Text 1"/>
+          <p:cNvSpPr/>
+          <p:nvPr/>
+        </p:nvSpPr>
+        <p:spPr>
+          <a:xfrm>
+            <a:off x="5829300" y="219456"/>
+            <a:ext cx="3017520" cy="274320"/>
+          </a:xfrm>
+          <a:prstGeom prst="rect">
+            <a:avLst/>
+          </a:prstGeom>
+          <a:noFill/>
+          <a:ln/>
+        </p:spPr>
+        <p:txBody>
+          <a:bodyPr wrap="square" rtlCol="0" anchor="ctr"/>
+          <a:lstStyle/>
+          <a:p>
+            <a:pPr algn="r"/>
+            <a:r>
+              <a:rPr lang="en-US" sz="900" dirty="0">
+                <a:solidFill>
+                  <a:srgbClr val="64748B"/>
+                </a:solidFill>
+              </a:rPr>
+              <a:t>Batch ingestion · Daily schedule</a:t>
+            </a:r>
+            <a:endParaRPr lang="en-US" sz="900" dirty="0"/>
+          </a:p>
+        </p:txBody>
+      </p:sp>
+      <p:sp>
+        <p:nvSpPr>
+          <p:cNvPr id="4" name="Shape 2"/>
+          <p:cNvSpPr/>
+          <p:nvPr/>
+        </p:nvSpPr>
+        <p:spPr>
+          <a:xfrm>
+            <a:off x="274320" y="582930"/>
+            <a:ext cx="8572500" cy="377190"/>
+          </a:xfrm>
+          <a:prstGeom prst="roundRect">
+            <a:avLst>
+              <a:gd name="adj" fmla="val 14545"/>
+            </a:avLst>
           </a:prstGeom>
           <a:solidFill>
-            <a:srgbClr val="0D1B2A"/>
+            <a:srgbClr val="EEF2FF"/>
           </a:solidFill>
           <a:ln w="12700">
             <a:solidFill>
-              <a:srgbClr val="0D1B2A"/>
+              <a:srgbClr val="6366F1"/>
             </a:solidFill>
             <a:prstDash val="solid"/>
           </a:ln>
@@ -14642,118 +13580,1470 @@
       </p:sp>
       <p:sp>
         <p:nvSpPr>
-          <p:cNvPr id="3" name="Text 1"/>
-          <p:cNvSpPr/>
-          <p:nvPr/>
-        </p:nvSpPr>
-        <p:spPr>
-          <a:xfrm>
-            <a:off x="365760" y="0"/>
-            <a:ext cx="8229600" cy="777240"/>
-          </a:xfrm>
-          <a:prstGeom prst="rect">
-            <a:avLst/>
-          </a:prstGeom>
-          <a:noFill/>
-          <a:ln/>
-        </p:spPr>
-        <p:txBody>
-          <a:bodyPr wrap="square" lIns="0" tIns="0" rIns="0" bIns="0" rtlCol="0" anchor="ctr"/>
-          <a:lstStyle/>
-          <a:p>
-            <a:pPr marL="0" indent="0">
-              <a:buNone/>
-            </a:pPr>
-            <a:r>
-              <a:rPr lang="en-US" sz="1300" b="1" kern="0" spc="300" dirty="0">
-                <a:solidFill>
-                  <a:srgbClr val="00B4D8"/>
-                </a:solidFill>
-              </a:rPr>
-              <a:t>PROJECT OVERVIEW</a:t>
-            </a:r>
-            <a:endParaRPr lang="en-US" sz="1300" dirty="0"/>
-          </a:p>
-        </p:txBody>
-      </p:sp>
-      <p:sp>
-        <p:nvSpPr>
-          <p:cNvPr id="4" name="Text 2"/>
-          <p:cNvSpPr/>
-          <p:nvPr/>
-        </p:nvSpPr>
-        <p:spPr>
-          <a:xfrm>
-            <a:off x="365760" y="0"/>
-            <a:ext cx="8229600" cy="777240"/>
-          </a:xfrm>
-          <a:prstGeom prst="rect">
-            <a:avLst/>
-          </a:prstGeom>
-          <a:noFill/>
-          <a:ln/>
-        </p:spPr>
-        <p:txBody>
-          <a:bodyPr wrap="square" lIns="0" tIns="0" rIns="0" bIns="0" rtlCol="0" anchor="ctr"/>
-          <a:lstStyle/>
-          <a:p>
-            <a:pPr marL="0" indent="0" algn="r">
-              <a:buNone/>
-            </a:pPr>
-            <a:r>
-              <a:rPr lang="en-US" sz="1300" b="1" dirty="0">
-                <a:solidFill>
-                  <a:srgbClr val="FFFFFF"/>
-                </a:solidFill>
-              </a:rPr>
-              <a:t>What I built and why</a:t>
-            </a:r>
-            <a:endParaRPr lang="en-US" sz="1300" dirty="0"/>
-          </a:p>
-        </p:txBody>
-      </p:sp>
-      <p:sp>
-        <p:nvSpPr>
-          <p:cNvPr id="5" name="Shape 3"/>
-          <p:cNvSpPr/>
-          <p:nvPr/>
-        </p:nvSpPr>
-        <p:spPr>
-          <a:xfrm>
-            <a:off x="365760" y="960120"/>
-            <a:ext cx="8412480" cy="914400"/>
-          </a:xfrm>
-          <a:prstGeom prst="rect">
-            <a:avLst/>
+          <p:cNvPr id="5" name="Text 3"/>
+          <p:cNvSpPr/>
+          <p:nvPr/>
+        </p:nvSpPr>
+        <p:spPr>
+          <a:xfrm>
+            <a:off x="274320" y="582930"/>
+            <a:ext cx="8572500" cy="377190"/>
+          </a:xfrm>
+          <a:prstGeom prst="rect">
+            <a:avLst/>
+          </a:prstGeom>
+          <a:noFill/>
+          <a:ln/>
+        </p:spPr>
+        <p:txBody>
+          <a:bodyPr wrap="square" rtlCol="0" anchor="ctr"/>
+          <a:lstStyle/>
+          <a:p>
+            <a:pPr algn="ctr"/>
+            <a:r>
+              <a:rPr lang="en-US" sz="975" b="1" dirty="0">
+                <a:solidFill>
+                  <a:srgbClr val="D97706"/>
+                </a:solidFill>
+              </a:rPr>
+              <a:t>🔒  </a:t>
+            </a:r>
+            <a:r>
+              <a:rPr lang="en-US" sz="975" b="1" dirty="0">
+                <a:solidFill>
+                  <a:srgbClr val="1E293B"/>
+                </a:solidFill>
+              </a:rPr>
+              <a:t>Azure Key Vault </a:t>
+            </a:r>
+            <a:r>
+              <a:rPr lang="en-US" sz="975" dirty="0">
+                <a:solidFill>
+                  <a:srgbClr val="475569"/>
+                </a:solidFill>
+              </a:rPr>
+              <a:t>— Secures all credentials throughout the pipeline</a:t>
+            </a:r>
+            <a:endParaRPr lang="en-US" sz="975" dirty="0"/>
+          </a:p>
+        </p:txBody>
+      </p:sp>
+      <p:sp>
+        <p:nvSpPr>
+          <p:cNvPr id="6" name="Shape 4"/>
+          <p:cNvSpPr/>
+          <p:nvPr/>
+        </p:nvSpPr>
+        <p:spPr>
+          <a:xfrm>
+            <a:off x="397764" y="1165860"/>
+            <a:ext cx="1062990" cy="1165860"/>
+          </a:xfrm>
+          <a:prstGeom prst="roundRect">
+            <a:avLst>
+              <a:gd name="adj" fmla="val 5161"/>
+            </a:avLst>
           </a:prstGeom>
           <a:solidFill>
-            <a:srgbClr val="0D1B2A"/>
+            <a:srgbClr val="CCFBF1"/>
+          </a:solidFill>
+          <a:ln w="25400">
+            <a:solidFill>
+              <a:srgbClr val="14B8A6"/>
+            </a:solidFill>
+            <a:prstDash val="solid"/>
+          </a:ln>
+        </p:spPr>
+      </p:sp>
+      <p:sp>
+        <p:nvSpPr>
+          <p:cNvPr id="7" name="Text 5"/>
+          <p:cNvSpPr/>
+          <p:nvPr/>
+        </p:nvSpPr>
+        <p:spPr>
+          <a:xfrm>
+            <a:off x="1255014" y="1179576"/>
+            <a:ext cx="171450" cy="137160"/>
+          </a:xfrm>
+          <a:prstGeom prst="rect">
+            <a:avLst/>
+          </a:prstGeom>
+          <a:noFill/>
+          <a:ln/>
+        </p:spPr>
+        <p:txBody>
+          <a:bodyPr wrap="square" rtlCol="0" anchor="ctr"/>
+          <a:lstStyle/>
+          <a:p>
+            <a:pPr algn="r"/>
+            <a:r>
+              <a:rPr lang="en-US" sz="675" dirty="0">
+                <a:solidFill>
+                  <a:srgbClr val="64748B"/>
+                </a:solidFill>
+              </a:rPr>
+              <a:t>1</a:t>
+            </a:r>
+            <a:endParaRPr lang="en-US" sz="675" dirty="0"/>
+          </a:p>
+        </p:txBody>
+      </p:sp>
+      <p:sp>
+        <p:nvSpPr>
+          <p:cNvPr id="8" name="Text 6"/>
+          <p:cNvSpPr/>
+          <p:nvPr/>
+        </p:nvSpPr>
+        <p:spPr>
+          <a:xfrm>
+            <a:off x="397764" y="1268730"/>
+            <a:ext cx="1062990" cy="342900"/>
+          </a:xfrm>
+          <a:prstGeom prst="rect">
+            <a:avLst/>
+          </a:prstGeom>
+          <a:noFill/>
+          <a:ln/>
+        </p:spPr>
+        <p:txBody>
+          <a:bodyPr wrap="square" rtlCol="0" anchor="ctr"/>
+          <a:lstStyle/>
+          <a:p>
+            <a:pPr algn="ctr"/>
+            <a:r>
+              <a:rPr lang="en-US" dirty="0">
+                <a:solidFill>
+                  <a:srgbClr val="000000"/>
+                </a:solidFill>
+              </a:rPr>
+              <a:t>📡</a:t>
+            </a:r>
+            <a:endParaRPr lang="en-US" dirty="0"/>
+          </a:p>
+        </p:txBody>
+      </p:sp>
+      <p:sp>
+        <p:nvSpPr>
+          <p:cNvPr id="9" name="Text 7"/>
+          <p:cNvSpPr/>
+          <p:nvPr/>
+        </p:nvSpPr>
+        <p:spPr>
+          <a:xfrm>
+            <a:off x="397764" y="1680210"/>
+            <a:ext cx="1062990" cy="240030"/>
+          </a:xfrm>
+          <a:prstGeom prst="rect">
+            <a:avLst/>
+          </a:prstGeom>
+          <a:noFill/>
+          <a:ln/>
+        </p:spPr>
+        <p:txBody>
+          <a:bodyPr wrap="square" rtlCol="0" anchor="ctr"/>
+          <a:lstStyle/>
+          <a:p>
+            <a:pPr algn="ctr"/>
+            <a:r>
+              <a:rPr lang="en-US" sz="825" b="1" dirty="0">
+                <a:solidFill>
+                  <a:srgbClr val="0F172A"/>
+                </a:solidFill>
+              </a:rPr>
+              <a:t>Trafiklab</a:t>
+            </a:r>
+            <a:endParaRPr lang="en-US" sz="825" dirty="0"/>
+          </a:p>
+        </p:txBody>
+      </p:sp>
+      <p:sp>
+        <p:nvSpPr>
+          <p:cNvPr id="10" name="Text 8"/>
+          <p:cNvSpPr/>
+          <p:nvPr/>
+        </p:nvSpPr>
+        <p:spPr>
+          <a:xfrm>
+            <a:off x="397764" y="1920240"/>
+            <a:ext cx="1062990" cy="342900"/>
+          </a:xfrm>
+          <a:prstGeom prst="rect">
+            <a:avLst/>
+          </a:prstGeom>
+          <a:noFill/>
+          <a:ln/>
+        </p:spPr>
+        <p:txBody>
+          <a:bodyPr wrap="square" rtlCol="0" anchor="ctr"/>
+          <a:lstStyle/>
+          <a:p>
+            <a:pPr algn="ctr"/>
+            <a:r>
+              <a:rPr lang="en-US" sz="675" b="1" dirty="0">
+                <a:solidFill>
+                  <a:srgbClr val="0F766E"/>
+                </a:solidFill>
+              </a:rPr>
+              <a:t>GTFS Static API</a:t>
+            </a:r>
+            <a:endParaRPr lang="en-US" sz="675" dirty="0"/>
+          </a:p>
+        </p:txBody>
+      </p:sp>
+      <p:sp>
+        <p:nvSpPr>
+          <p:cNvPr id="11" name="Text 9"/>
+          <p:cNvSpPr/>
+          <p:nvPr/>
+        </p:nvSpPr>
+        <p:spPr>
+          <a:xfrm>
+            <a:off x="1467612" y="1645920"/>
+            <a:ext cx="137160" cy="274320"/>
+          </a:xfrm>
+          <a:prstGeom prst="rect">
+            <a:avLst/>
+          </a:prstGeom>
+          <a:noFill/>
+          <a:ln/>
+        </p:spPr>
+        <p:txBody>
+          <a:bodyPr wrap="square" rtlCol="0" anchor="ctr"/>
+          <a:lstStyle/>
+          <a:p>
+            <a:pPr algn="ctr"/>
+            <a:r>
+              <a:rPr lang="en-US" sz="1500" b="1" dirty="0">
+                <a:solidFill>
+                  <a:srgbClr val="0891B2"/>
+                </a:solidFill>
+              </a:rPr>
+              <a:t>→</a:t>
+            </a:r>
+            <a:endParaRPr lang="en-US" sz="1500" dirty="0"/>
+          </a:p>
+        </p:txBody>
+      </p:sp>
+      <p:sp>
+        <p:nvSpPr>
+          <p:cNvPr id="12" name="Shape 10"/>
+          <p:cNvSpPr/>
+          <p:nvPr/>
+        </p:nvSpPr>
+        <p:spPr>
+          <a:xfrm>
+            <a:off x="1611630" y="1165860"/>
+            <a:ext cx="1062990" cy="1165860"/>
+          </a:xfrm>
+          <a:prstGeom prst="roundRect">
+            <a:avLst>
+              <a:gd name="adj" fmla="val 5161"/>
+            </a:avLst>
+          </a:prstGeom>
+          <a:solidFill>
+            <a:srgbClr val="CCFBF1"/>
+          </a:solidFill>
+          <a:ln w="25400">
+            <a:solidFill>
+              <a:srgbClr val="14B8A6"/>
+            </a:solidFill>
+            <a:prstDash val="solid"/>
+          </a:ln>
+        </p:spPr>
+      </p:sp>
+      <p:sp>
+        <p:nvSpPr>
+          <p:cNvPr id="13" name="Text 11"/>
+          <p:cNvSpPr/>
+          <p:nvPr/>
+        </p:nvSpPr>
+        <p:spPr>
+          <a:xfrm>
+            <a:off x="2468880" y="1179576"/>
+            <a:ext cx="171450" cy="137160"/>
+          </a:xfrm>
+          <a:prstGeom prst="rect">
+            <a:avLst/>
+          </a:prstGeom>
+          <a:noFill/>
+          <a:ln/>
+        </p:spPr>
+        <p:txBody>
+          <a:bodyPr wrap="square" rtlCol="0" anchor="ctr"/>
+          <a:lstStyle/>
+          <a:p>
+            <a:pPr algn="r"/>
+            <a:r>
+              <a:rPr lang="en-US" sz="675" dirty="0">
+                <a:solidFill>
+                  <a:srgbClr val="64748B"/>
+                </a:solidFill>
+              </a:rPr>
+              <a:t>2</a:t>
+            </a:r>
+            <a:endParaRPr lang="en-US" sz="675" dirty="0"/>
+          </a:p>
+        </p:txBody>
+      </p:sp>
+      <p:sp>
+        <p:nvSpPr>
+          <p:cNvPr id="14" name="Text 12"/>
+          <p:cNvSpPr/>
+          <p:nvPr/>
+        </p:nvSpPr>
+        <p:spPr>
+          <a:xfrm>
+            <a:off x="1611630" y="1268730"/>
+            <a:ext cx="1062990" cy="342900"/>
+          </a:xfrm>
+          <a:prstGeom prst="rect">
+            <a:avLst/>
+          </a:prstGeom>
+          <a:noFill/>
+          <a:ln/>
+        </p:spPr>
+        <p:txBody>
+          <a:bodyPr wrap="square" rtlCol="0" anchor="ctr"/>
+          <a:lstStyle/>
+          <a:p>
+            <a:pPr algn="ctr"/>
+            <a:r>
+              <a:rPr lang="en-US" dirty="0">
+                <a:solidFill>
+                  <a:srgbClr val="000000"/>
+                </a:solidFill>
+              </a:rPr>
+              <a:t>📄</a:t>
+            </a:r>
+            <a:endParaRPr lang="en-US" dirty="0"/>
+          </a:p>
+        </p:txBody>
+      </p:sp>
+      <p:sp>
+        <p:nvSpPr>
+          <p:cNvPr id="15" name="Text 13"/>
+          <p:cNvSpPr/>
+          <p:nvPr/>
+        </p:nvSpPr>
+        <p:spPr>
+          <a:xfrm>
+            <a:off x="1611630" y="1680210"/>
+            <a:ext cx="1062990" cy="240030"/>
+          </a:xfrm>
+          <a:prstGeom prst="rect">
+            <a:avLst/>
+          </a:prstGeom>
+          <a:noFill/>
+          <a:ln/>
+        </p:spPr>
+        <p:txBody>
+          <a:bodyPr wrap="square" rtlCol="0" anchor="ctr"/>
+          <a:lstStyle/>
+          <a:p>
+            <a:pPr algn="ctr"/>
+            <a:r>
+              <a:rPr lang="en-US" sz="825" b="1" dirty="0">
+                <a:solidFill>
+                  <a:srgbClr val="0F172A"/>
+                </a:solidFill>
+              </a:rPr>
+              <a:t>upload_stops.py</a:t>
+            </a:r>
+            <a:endParaRPr lang="en-US" sz="825" dirty="0"/>
+          </a:p>
+        </p:txBody>
+      </p:sp>
+      <p:sp>
+        <p:nvSpPr>
+          <p:cNvPr id="16" name="Text 14"/>
+          <p:cNvSpPr/>
+          <p:nvPr/>
+        </p:nvSpPr>
+        <p:spPr>
+          <a:xfrm>
+            <a:off x="1611630" y="1920240"/>
+            <a:ext cx="1062990" cy="342900"/>
+          </a:xfrm>
+          <a:prstGeom prst="rect">
+            <a:avLst/>
+          </a:prstGeom>
+          <a:noFill/>
+          <a:ln/>
+        </p:spPr>
+        <p:txBody>
+          <a:bodyPr wrap="square" rtlCol="0" anchor="ctr"/>
+          <a:lstStyle/>
+          <a:p>
+            <a:pPr algn="ctr"/>
+            <a:r>
+              <a:rPr lang="en-US" sz="675" b="1" dirty="0">
+                <a:solidFill>
+                  <a:srgbClr val="0F766E"/>
+                </a:solidFill>
+              </a:rPr>
+              <a:t>Python script</a:t>
+            </a:r>
+            <a:endParaRPr lang="en-US" sz="675" dirty="0"/>
+          </a:p>
+        </p:txBody>
+      </p:sp>
+      <p:sp>
+        <p:nvSpPr>
+          <p:cNvPr id="17" name="Text 15"/>
+          <p:cNvSpPr/>
+          <p:nvPr/>
+        </p:nvSpPr>
+        <p:spPr>
+          <a:xfrm>
+            <a:off x="2681478" y="1645920"/>
+            <a:ext cx="137160" cy="274320"/>
+          </a:xfrm>
+          <a:prstGeom prst="rect">
+            <a:avLst/>
+          </a:prstGeom>
+          <a:noFill/>
+          <a:ln/>
+        </p:spPr>
+        <p:txBody>
+          <a:bodyPr wrap="square" rtlCol="0" anchor="ctr"/>
+          <a:lstStyle/>
+          <a:p>
+            <a:pPr algn="ctr"/>
+            <a:r>
+              <a:rPr lang="en-US" sz="1500" b="1" dirty="0">
+                <a:solidFill>
+                  <a:srgbClr val="0891B2"/>
+                </a:solidFill>
+              </a:rPr>
+              <a:t>→</a:t>
+            </a:r>
+            <a:endParaRPr lang="en-US" sz="1500" dirty="0"/>
+          </a:p>
+        </p:txBody>
+      </p:sp>
+      <p:sp>
+        <p:nvSpPr>
+          <p:cNvPr id="18" name="Shape 16"/>
+          <p:cNvSpPr/>
+          <p:nvPr/>
+        </p:nvSpPr>
+        <p:spPr>
+          <a:xfrm>
+            <a:off x="2825496" y="1165860"/>
+            <a:ext cx="1062990" cy="1165860"/>
+          </a:xfrm>
+          <a:prstGeom prst="roundRect">
+            <a:avLst>
+              <a:gd name="adj" fmla="val 5161"/>
+            </a:avLst>
+          </a:prstGeom>
+          <a:solidFill>
+            <a:srgbClr val="DBEAFE"/>
+          </a:solidFill>
+          <a:ln w="25400">
+            <a:solidFill>
+              <a:srgbClr val="3B82F6"/>
+            </a:solidFill>
+            <a:prstDash val="solid"/>
+          </a:ln>
+        </p:spPr>
+      </p:sp>
+      <p:sp>
+        <p:nvSpPr>
+          <p:cNvPr id="19" name="Text 17"/>
+          <p:cNvSpPr/>
+          <p:nvPr/>
+        </p:nvSpPr>
+        <p:spPr>
+          <a:xfrm>
+            <a:off x="3682746" y="1179576"/>
+            <a:ext cx="171450" cy="137160"/>
+          </a:xfrm>
+          <a:prstGeom prst="rect">
+            <a:avLst/>
+          </a:prstGeom>
+          <a:noFill/>
+          <a:ln/>
+        </p:spPr>
+        <p:txBody>
+          <a:bodyPr wrap="square" rtlCol="0" anchor="ctr"/>
+          <a:lstStyle/>
+          <a:p>
+            <a:pPr algn="r"/>
+            <a:r>
+              <a:rPr lang="en-US" sz="675" dirty="0">
+                <a:solidFill>
+                  <a:srgbClr val="64748B"/>
+                </a:solidFill>
+              </a:rPr>
+              <a:t>3</a:t>
+            </a:r>
+            <a:endParaRPr lang="en-US" sz="675" dirty="0"/>
+          </a:p>
+        </p:txBody>
+      </p:sp>
+      <p:sp>
+        <p:nvSpPr>
+          <p:cNvPr id="20" name="Text 18"/>
+          <p:cNvSpPr/>
+          <p:nvPr/>
+        </p:nvSpPr>
+        <p:spPr>
+          <a:xfrm>
+            <a:off x="2825496" y="1268730"/>
+            <a:ext cx="1062990" cy="342900"/>
+          </a:xfrm>
+          <a:prstGeom prst="rect">
+            <a:avLst/>
+          </a:prstGeom>
+          <a:noFill/>
+          <a:ln/>
+        </p:spPr>
+        <p:txBody>
+          <a:bodyPr wrap="square" rtlCol="0" anchor="ctr"/>
+          <a:lstStyle/>
+          <a:p>
+            <a:pPr algn="ctr"/>
+            <a:r>
+              <a:rPr lang="en-US" dirty="0">
+                <a:solidFill>
+                  <a:srgbClr val="000000"/>
+                </a:solidFill>
+              </a:rPr>
+              <a:t>💾</a:t>
+            </a:r>
+            <a:endParaRPr lang="en-US" dirty="0"/>
+          </a:p>
+        </p:txBody>
+      </p:sp>
+      <p:sp>
+        <p:nvSpPr>
+          <p:cNvPr id="21" name="Text 19"/>
+          <p:cNvSpPr/>
+          <p:nvPr/>
+        </p:nvSpPr>
+        <p:spPr>
+          <a:xfrm>
+            <a:off x="2825496" y="1680210"/>
+            <a:ext cx="1062990" cy="240030"/>
+          </a:xfrm>
+          <a:prstGeom prst="rect">
+            <a:avLst/>
+          </a:prstGeom>
+          <a:noFill/>
+          <a:ln/>
+        </p:spPr>
+        <p:txBody>
+          <a:bodyPr wrap="square" rtlCol="0" anchor="ctr"/>
+          <a:lstStyle/>
+          <a:p>
+            <a:pPr algn="ctr"/>
+            <a:r>
+              <a:rPr lang="en-US" sz="825" b="1" dirty="0">
+                <a:solidFill>
+                  <a:srgbClr val="0F172A"/>
+                </a:solidFill>
+              </a:rPr>
+              <a:t>ADLS Gen2</a:t>
+            </a:r>
+            <a:endParaRPr lang="en-US" sz="825" dirty="0"/>
+          </a:p>
+        </p:txBody>
+      </p:sp>
+      <p:sp>
+        <p:nvSpPr>
+          <p:cNvPr id="22" name="Text 20"/>
+          <p:cNvSpPr/>
+          <p:nvPr/>
+        </p:nvSpPr>
+        <p:spPr>
+          <a:xfrm>
+            <a:off x="2825496" y="1920240"/>
+            <a:ext cx="1062990" cy="342900"/>
+          </a:xfrm>
+          <a:prstGeom prst="rect">
+            <a:avLst/>
+          </a:prstGeom>
+          <a:noFill/>
+          <a:ln/>
+        </p:spPr>
+        <p:txBody>
+          <a:bodyPr wrap="square" rtlCol="0" anchor="ctr"/>
+          <a:lstStyle/>
+          <a:p>
+            <a:pPr algn="ctr"/>
+            <a:r>
+              <a:rPr lang="en-US" sz="675" b="1" dirty="0">
+                <a:solidFill>
+                  <a:srgbClr val="1D4ED8"/>
+                </a:solidFill>
+              </a:rPr>
+              <a:t>Bronze container</a:t>
+            </a:r>
+            <a:endParaRPr lang="en-US" sz="675" dirty="0"/>
+          </a:p>
+        </p:txBody>
+      </p:sp>
+      <p:sp>
+        <p:nvSpPr>
+          <p:cNvPr id="23" name="Text 21"/>
+          <p:cNvSpPr/>
+          <p:nvPr/>
+        </p:nvSpPr>
+        <p:spPr>
+          <a:xfrm>
+            <a:off x="3895344" y="1645920"/>
+            <a:ext cx="137160" cy="274320"/>
+          </a:xfrm>
+          <a:prstGeom prst="rect">
+            <a:avLst/>
+          </a:prstGeom>
+          <a:noFill/>
+          <a:ln/>
+        </p:spPr>
+        <p:txBody>
+          <a:bodyPr wrap="square" rtlCol="0" anchor="ctr"/>
+          <a:lstStyle/>
+          <a:p>
+            <a:pPr algn="ctr"/>
+            <a:r>
+              <a:rPr lang="en-US" sz="1500" b="1" dirty="0">
+                <a:solidFill>
+                  <a:srgbClr val="0891B2"/>
+                </a:solidFill>
+              </a:rPr>
+              <a:t>→</a:t>
+            </a:r>
+            <a:endParaRPr lang="en-US" sz="1500" dirty="0"/>
+          </a:p>
+        </p:txBody>
+      </p:sp>
+      <p:sp>
+        <p:nvSpPr>
+          <p:cNvPr id="24" name="Shape 22"/>
+          <p:cNvSpPr/>
+          <p:nvPr/>
+        </p:nvSpPr>
+        <p:spPr>
+          <a:xfrm>
+            <a:off x="4039362" y="1165860"/>
+            <a:ext cx="1062990" cy="1165860"/>
+          </a:xfrm>
+          <a:prstGeom prst="roundRect">
+            <a:avLst>
+              <a:gd name="adj" fmla="val 5161"/>
+            </a:avLst>
+          </a:prstGeom>
+          <a:solidFill>
+            <a:srgbClr val="CCFBF1"/>
+          </a:solidFill>
+          <a:ln w="25400">
+            <a:solidFill>
+              <a:srgbClr val="14B8A6"/>
+            </a:solidFill>
+            <a:prstDash val="solid"/>
+          </a:ln>
+        </p:spPr>
+      </p:sp>
+      <p:sp>
+        <p:nvSpPr>
+          <p:cNvPr id="25" name="Text 23"/>
+          <p:cNvSpPr/>
+          <p:nvPr/>
+        </p:nvSpPr>
+        <p:spPr>
+          <a:xfrm>
+            <a:off x="4896612" y="1179576"/>
+            <a:ext cx="171450" cy="137160"/>
+          </a:xfrm>
+          <a:prstGeom prst="rect">
+            <a:avLst/>
+          </a:prstGeom>
+          <a:noFill/>
+          <a:ln/>
+        </p:spPr>
+        <p:txBody>
+          <a:bodyPr wrap="square" rtlCol="0" anchor="ctr"/>
+          <a:lstStyle/>
+          <a:p>
+            <a:pPr algn="r"/>
+            <a:r>
+              <a:rPr lang="en-US" sz="675" dirty="0">
+                <a:solidFill>
+                  <a:srgbClr val="64748B"/>
+                </a:solidFill>
+              </a:rPr>
+              <a:t>4</a:t>
+            </a:r>
+            <a:endParaRPr lang="en-US" sz="675" dirty="0"/>
+          </a:p>
+        </p:txBody>
+      </p:sp>
+      <p:sp>
+        <p:nvSpPr>
+          <p:cNvPr id="26" name="Text 24"/>
+          <p:cNvSpPr/>
+          <p:nvPr/>
+        </p:nvSpPr>
+        <p:spPr>
+          <a:xfrm>
+            <a:off x="4039362" y="1268730"/>
+            <a:ext cx="1062990" cy="342900"/>
+          </a:xfrm>
+          <a:prstGeom prst="rect">
+            <a:avLst/>
+          </a:prstGeom>
+          <a:noFill/>
+          <a:ln/>
+        </p:spPr>
+        <p:txBody>
+          <a:bodyPr wrap="square" rtlCol="0" anchor="ctr"/>
+          <a:lstStyle/>
+          <a:p>
+            <a:pPr algn="ctr"/>
+            <a:r>
+              <a:rPr lang="en-US" dirty="0">
+                <a:solidFill>
+                  <a:srgbClr val="000000"/>
+                </a:solidFill>
+              </a:rPr>
+              <a:t>🏭</a:t>
+            </a:r>
+            <a:endParaRPr lang="en-US" dirty="0"/>
+          </a:p>
+        </p:txBody>
+      </p:sp>
+      <p:sp>
+        <p:nvSpPr>
+          <p:cNvPr id="27" name="Text 25"/>
+          <p:cNvSpPr/>
+          <p:nvPr/>
+        </p:nvSpPr>
+        <p:spPr>
+          <a:xfrm>
+            <a:off x="4039362" y="1680210"/>
+            <a:ext cx="1062990" cy="240030"/>
+          </a:xfrm>
+          <a:prstGeom prst="rect">
+            <a:avLst/>
+          </a:prstGeom>
+          <a:noFill/>
+          <a:ln/>
+        </p:spPr>
+        <p:txBody>
+          <a:bodyPr wrap="square" rtlCol="0" anchor="ctr"/>
+          <a:lstStyle/>
+          <a:p>
+            <a:pPr algn="ctr"/>
+            <a:r>
+              <a:rPr lang="en-US" sz="825" b="1" dirty="0">
+                <a:solidFill>
+                  <a:srgbClr val="0F172A"/>
+                </a:solidFill>
+              </a:rPr>
+              <a:t>ADF</a:t>
+            </a:r>
+            <a:endParaRPr lang="en-US" sz="825" dirty="0"/>
+          </a:p>
+        </p:txBody>
+      </p:sp>
+      <p:sp>
+        <p:nvSpPr>
+          <p:cNvPr id="28" name="Text 26"/>
+          <p:cNvSpPr/>
+          <p:nvPr/>
+        </p:nvSpPr>
+        <p:spPr>
+          <a:xfrm>
+            <a:off x="4039362" y="1920240"/>
+            <a:ext cx="1062990" cy="342900"/>
+          </a:xfrm>
+          <a:prstGeom prst="rect">
+            <a:avLst/>
+          </a:prstGeom>
+          <a:noFill/>
+          <a:ln/>
+        </p:spPr>
+        <p:txBody>
+          <a:bodyPr wrap="square" rtlCol="0" anchor="ctr"/>
+          <a:lstStyle/>
+          <a:p>
+            <a:pPr algn="ctr"/>
+            <a:r>
+              <a:rPr lang="en-US" sz="675" b="1" dirty="0">
+                <a:solidFill>
+                  <a:srgbClr val="0F766E"/>
+                </a:solidFill>
+              </a:rPr>
+              <a:t>Daily trigger</a:t>
+            </a:r>
+            <a:endParaRPr lang="en-US" sz="675" dirty="0"/>
+          </a:p>
+        </p:txBody>
+      </p:sp>
+      <p:sp>
+        <p:nvSpPr>
+          <p:cNvPr id="29" name="Text 27"/>
+          <p:cNvSpPr/>
+          <p:nvPr/>
+        </p:nvSpPr>
+        <p:spPr>
+          <a:xfrm>
+            <a:off x="5109210" y="1645920"/>
+            <a:ext cx="137160" cy="274320"/>
+          </a:xfrm>
+          <a:prstGeom prst="rect">
+            <a:avLst/>
+          </a:prstGeom>
+          <a:noFill/>
+          <a:ln/>
+        </p:spPr>
+        <p:txBody>
+          <a:bodyPr wrap="square" rtlCol="0" anchor="ctr"/>
+          <a:lstStyle/>
+          <a:p>
+            <a:pPr algn="ctr"/>
+            <a:r>
+              <a:rPr lang="en-US" sz="1500" b="1" dirty="0">
+                <a:solidFill>
+                  <a:srgbClr val="0891B2"/>
+                </a:solidFill>
+              </a:rPr>
+              <a:t>→</a:t>
+            </a:r>
+            <a:endParaRPr lang="en-US" sz="1500" dirty="0"/>
+          </a:p>
+        </p:txBody>
+      </p:sp>
+      <p:sp>
+        <p:nvSpPr>
+          <p:cNvPr id="30" name="Shape 28"/>
+          <p:cNvSpPr/>
+          <p:nvPr/>
+        </p:nvSpPr>
+        <p:spPr>
+          <a:xfrm>
+            <a:off x="5253228" y="1165860"/>
+            <a:ext cx="1062990" cy="1165860"/>
+          </a:xfrm>
+          <a:prstGeom prst="roundRect">
+            <a:avLst>
+              <a:gd name="adj" fmla="val 5161"/>
+            </a:avLst>
+          </a:prstGeom>
+          <a:solidFill>
+            <a:srgbClr val="CCFBF1"/>
+          </a:solidFill>
+          <a:ln w="25400">
+            <a:solidFill>
+              <a:srgbClr val="14B8A6"/>
+            </a:solidFill>
+            <a:prstDash val="solid"/>
+          </a:ln>
+        </p:spPr>
+      </p:sp>
+      <p:sp>
+        <p:nvSpPr>
+          <p:cNvPr id="31" name="Text 29"/>
+          <p:cNvSpPr/>
+          <p:nvPr/>
+        </p:nvSpPr>
+        <p:spPr>
+          <a:xfrm>
+            <a:off x="6110478" y="1179576"/>
+            <a:ext cx="171450" cy="137160"/>
+          </a:xfrm>
+          <a:prstGeom prst="rect">
+            <a:avLst/>
+          </a:prstGeom>
+          <a:noFill/>
+          <a:ln/>
+        </p:spPr>
+        <p:txBody>
+          <a:bodyPr wrap="square" rtlCol="0" anchor="ctr"/>
+          <a:lstStyle/>
+          <a:p>
+            <a:pPr algn="r"/>
+            <a:r>
+              <a:rPr lang="en-US" sz="675" dirty="0">
+                <a:solidFill>
+                  <a:srgbClr val="64748B"/>
+                </a:solidFill>
+              </a:rPr>
+              <a:t>5</a:t>
+            </a:r>
+            <a:endParaRPr lang="en-US" sz="675" dirty="0"/>
+          </a:p>
+        </p:txBody>
+      </p:sp>
+      <p:sp>
+        <p:nvSpPr>
+          <p:cNvPr id="32" name="Text 30"/>
+          <p:cNvSpPr/>
+          <p:nvPr/>
+        </p:nvSpPr>
+        <p:spPr>
+          <a:xfrm>
+            <a:off x="5253228" y="1268730"/>
+            <a:ext cx="1062990" cy="342900"/>
+          </a:xfrm>
+          <a:prstGeom prst="rect">
+            <a:avLst/>
+          </a:prstGeom>
+          <a:noFill/>
+          <a:ln/>
+        </p:spPr>
+        <p:txBody>
+          <a:bodyPr wrap="square" rtlCol="0" anchor="ctr"/>
+          <a:lstStyle/>
+          <a:p>
+            <a:pPr algn="ctr"/>
+            <a:r>
+              <a:rPr lang="en-US" dirty="0">
+                <a:solidFill>
+                  <a:srgbClr val="000000"/>
+                </a:solidFill>
+              </a:rPr>
+              <a:t>❄️</a:t>
+            </a:r>
+            <a:endParaRPr lang="en-US" dirty="0"/>
+          </a:p>
+        </p:txBody>
+      </p:sp>
+      <p:sp>
+        <p:nvSpPr>
+          <p:cNvPr id="33" name="Text 31"/>
+          <p:cNvSpPr/>
+          <p:nvPr/>
+        </p:nvSpPr>
+        <p:spPr>
+          <a:xfrm>
+            <a:off x="5253228" y="1680210"/>
+            <a:ext cx="1062990" cy="240030"/>
+          </a:xfrm>
+          <a:prstGeom prst="rect">
+            <a:avLst/>
+          </a:prstGeom>
+          <a:noFill/>
+          <a:ln/>
+        </p:spPr>
+        <p:txBody>
+          <a:bodyPr wrap="square" rtlCol="0" anchor="ctr"/>
+          <a:lstStyle/>
+          <a:p>
+            <a:pPr algn="ctr"/>
+            <a:r>
+              <a:rPr lang="en-US" sz="825" b="1" dirty="0">
+                <a:solidFill>
+                  <a:srgbClr val="0F172A"/>
+                </a:solidFill>
+              </a:rPr>
+              <a:t>Snowflake</a:t>
+            </a:r>
+            <a:endParaRPr lang="en-US" sz="825" dirty="0"/>
+          </a:p>
+        </p:txBody>
+      </p:sp>
+      <p:sp>
+        <p:nvSpPr>
+          <p:cNvPr id="34" name="Text 32"/>
+          <p:cNvSpPr/>
+          <p:nvPr/>
+        </p:nvSpPr>
+        <p:spPr>
+          <a:xfrm>
+            <a:off x="5253228" y="1920240"/>
+            <a:ext cx="1062990" cy="342900"/>
+          </a:xfrm>
+          <a:prstGeom prst="rect">
+            <a:avLst/>
+          </a:prstGeom>
+          <a:noFill/>
+          <a:ln/>
+        </p:spPr>
+        <p:txBody>
+          <a:bodyPr wrap="square" rtlCol="0" anchor="ctr"/>
+          <a:lstStyle/>
+          <a:p>
+            <a:pPr algn="ctr"/>
+            <a:r>
+              <a:rPr lang="en-US" sz="675" b="1" dirty="0">
+                <a:solidFill>
+                  <a:srgbClr val="0F766E"/>
+                </a:solidFill>
+              </a:rPr>
+              <a:t>Bronze→Silver→Gold</a:t>
+            </a:r>
+            <a:endParaRPr lang="en-US" sz="675" dirty="0"/>
+          </a:p>
+        </p:txBody>
+      </p:sp>
+      <p:sp>
+        <p:nvSpPr>
+          <p:cNvPr id="35" name="Text 33"/>
+          <p:cNvSpPr/>
+          <p:nvPr/>
+        </p:nvSpPr>
+        <p:spPr>
+          <a:xfrm>
+            <a:off x="6323076" y="1543050"/>
+            <a:ext cx="137160" cy="274320"/>
+          </a:xfrm>
+          <a:prstGeom prst="rect">
+            <a:avLst/>
+          </a:prstGeom>
+          <a:noFill/>
+          <a:ln/>
+        </p:spPr>
+        <p:txBody>
+          <a:bodyPr wrap="square" rtlCol="0" anchor="ctr"/>
+          <a:lstStyle/>
+          <a:p>
+            <a:pPr algn="ctr"/>
+            <a:r>
+              <a:rPr lang="en-US" sz="1350" b="1" dirty="0">
+                <a:solidFill>
+                  <a:srgbClr val="D946EF"/>
+                </a:solidFill>
+              </a:rPr>
+              <a:t>⇆</a:t>
+            </a:r>
+            <a:endParaRPr lang="en-US" sz="1350" dirty="0"/>
+          </a:p>
+        </p:txBody>
+      </p:sp>
+      <p:sp>
+        <p:nvSpPr>
+          <p:cNvPr id="36" name="Text 34"/>
+          <p:cNvSpPr/>
+          <p:nvPr/>
+        </p:nvSpPr>
+        <p:spPr>
+          <a:xfrm>
+            <a:off x="6288786" y="1817370"/>
+            <a:ext cx="205740" cy="137160"/>
+          </a:xfrm>
+          <a:prstGeom prst="rect">
+            <a:avLst/>
+          </a:prstGeom>
+          <a:noFill/>
+          <a:ln/>
+        </p:spPr>
+        <p:txBody>
+          <a:bodyPr wrap="square" rtlCol="0" anchor="ctr"/>
+          <a:lstStyle/>
+          <a:p>
+            <a:pPr algn="ctr"/>
+            <a:r>
+              <a:rPr lang="en-US" sz="525" b="1" dirty="0">
+                <a:solidFill>
+                  <a:srgbClr val="D946EF"/>
+                </a:solidFill>
+              </a:rPr>
+              <a:t>sync</a:t>
+            </a:r>
+            <a:endParaRPr lang="en-US" sz="525" dirty="0"/>
+          </a:p>
+        </p:txBody>
+      </p:sp>
+      <p:sp>
+        <p:nvSpPr>
+          <p:cNvPr id="37" name="Shape 35"/>
+          <p:cNvSpPr/>
+          <p:nvPr/>
+        </p:nvSpPr>
+        <p:spPr>
+          <a:xfrm>
+            <a:off x="6467094" y="1165860"/>
+            <a:ext cx="1062990" cy="1165860"/>
+          </a:xfrm>
+          <a:prstGeom prst="roundRect">
+            <a:avLst>
+              <a:gd name="adj" fmla="val 5161"/>
+            </a:avLst>
+          </a:prstGeom>
+          <a:solidFill>
+            <a:srgbClr val="FEF3C7"/>
+          </a:solidFill>
+          <a:ln w="25400">
+            <a:solidFill>
+              <a:srgbClr val="F59E0B"/>
+            </a:solidFill>
+            <a:prstDash val="solid"/>
+          </a:ln>
+        </p:spPr>
+      </p:sp>
+      <p:sp>
+        <p:nvSpPr>
+          <p:cNvPr id="38" name="Text 36"/>
+          <p:cNvSpPr/>
+          <p:nvPr/>
+        </p:nvSpPr>
+        <p:spPr>
+          <a:xfrm>
+            <a:off x="7324344" y="1179576"/>
+            <a:ext cx="171450" cy="137160"/>
+          </a:xfrm>
+          <a:prstGeom prst="rect">
+            <a:avLst/>
+          </a:prstGeom>
+          <a:noFill/>
+          <a:ln/>
+        </p:spPr>
+        <p:txBody>
+          <a:bodyPr wrap="square" rtlCol="0" anchor="ctr"/>
+          <a:lstStyle/>
+          <a:p>
+            <a:pPr algn="r"/>
+            <a:r>
+              <a:rPr lang="en-US" sz="675" dirty="0">
+                <a:solidFill>
+                  <a:srgbClr val="64748B"/>
+                </a:solidFill>
+              </a:rPr>
+              <a:t>6</a:t>
+            </a:r>
+            <a:endParaRPr lang="en-US" sz="675" dirty="0"/>
+          </a:p>
+        </p:txBody>
+      </p:sp>
+      <p:sp>
+        <p:nvSpPr>
+          <p:cNvPr id="39" name="Text 37"/>
+          <p:cNvSpPr/>
+          <p:nvPr/>
+        </p:nvSpPr>
+        <p:spPr>
+          <a:xfrm>
+            <a:off x="6467094" y="1268730"/>
+            <a:ext cx="1062990" cy="342900"/>
+          </a:xfrm>
+          <a:prstGeom prst="rect">
+            <a:avLst/>
+          </a:prstGeom>
+          <a:noFill/>
+          <a:ln/>
+        </p:spPr>
+        <p:txBody>
+          <a:bodyPr wrap="square" rtlCol="0" anchor="ctr"/>
+          <a:lstStyle/>
+          <a:p>
+            <a:pPr algn="ctr"/>
+            <a:r>
+              <a:rPr lang="en-US" dirty="0">
+                <a:solidFill>
+                  <a:srgbClr val="000000"/>
+                </a:solidFill>
+              </a:rPr>
+              <a:t>🔧</a:t>
+            </a:r>
+            <a:endParaRPr lang="en-US" dirty="0"/>
+          </a:p>
+        </p:txBody>
+      </p:sp>
+      <p:sp>
+        <p:nvSpPr>
+          <p:cNvPr id="40" name="Text 38"/>
+          <p:cNvSpPr/>
+          <p:nvPr/>
+        </p:nvSpPr>
+        <p:spPr>
+          <a:xfrm>
+            <a:off x="6467094" y="1680210"/>
+            <a:ext cx="1062990" cy="240030"/>
+          </a:xfrm>
+          <a:prstGeom prst="rect">
+            <a:avLst/>
+          </a:prstGeom>
+          <a:noFill/>
+          <a:ln/>
+        </p:spPr>
+        <p:txBody>
+          <a:bodyPr wrap="square" rtlCol="0" anchor="ctr"/>
+          <a:lstStyle/>
+          <a:p>
+            <a:pPr algn="ctr"/>
+            <a:r>
+              <a:rPr lang="en-US" sz="825" b="1" dirty="0">
+                <a:solidFill>
+                  <a:srgbClr val="0F172A"/>
+                </a:solidFill>
+              </a:rPr>
+              <a:t>dbt Cloud</a:t>
+            </a:r>
+            <a:endParaRPr lang="en-US" sz="825" dirty="0"/>
+          </a:p>
+        </p:txBody>
+      </p:sp>
+      <p:sp>
+        <p:nvSpPr>
+          <p:cNvPr id="41" name="Text 39"/>
+          <p:cNvSpPr/>
+          <p:nvPr/>
+        </p:nvSpPr>
+        <p:spPr>
+          <a:xfrm>
+            <a:off x="6467094" y="1920240"/>
+            <a:ext cx="1062990" cy="342900"/>
+          </a:xfrm>
+          <a:prstGeom prst="rect">
+            <a:avLst/>
+          </a:prstGeom>
+          <a:noFill/>
+          <a:ln/>
+        </p:spPr>
+        <p:txBody>
+          <a:bodyPr wrap="square" rtlCol="0" anchor="ctr"/>
+          <a:lstStyle/>
+          <a:p>
+            <a:pPr algn="ctr"/>
+            <a:r>
+              <a:rPr lang="en-US" sz="675" b="1" dirty="0">
+                <a:solidFill>
+                  <a:srgbClr val="B45309"/>
+                </a:solidFill>
+              </a:rPr>
+              <a:t>Transform + tests</a:t>
+            </a:r>
+            <a:endParaRPr lang="en-US" sz="675" dirty="0"/>
+          </a:p>
+        </p:txBody>
+      </p:sp>
+      <p:sp>
+        <p:nvSpPr>
+          <p:cNvPr id="42" name="Text 40"/>
+          <p:cNvSpPr/>
+          <p:nvPr/>
+        </p:nvSpPr>
+        <p:spPr>
+          <a:xfrm>
+            <a:off x="7536942" y="1645920"/>
+            <a:ext cx="137160" cy="274320"/>
+          </a:xfrm>
+          <a:prstGeom prst="rect">
+            <a:avLst/>
+          </a:prstGeom>
+          <a:noFill/>
+          <a:ln/>
+        </p:spPr>
+        <p:txBody>
+          <a:bodyPr wrap="square" rtlCol="0" anchor="ctr"/>
+          <a:lstStyle/>
+          <a:p>
+            <a:pPr algn="ctr"/>
+            <a:r>
+              <a:rPr lang="en-US" sz="1500" b="1" dirty="0">
+                <a:solidFill>
+                  <a:srgbClr val="0891B2"/>
+                </a:solidFill>
+              </a:rPr>
+              <a:t>→</a:t>
+            </a:r>
+            <a:endParaRPr lang="en-US" sz="1500" dirty="0"/>
+          </a:p>
+        </p:txBody>
+      </p:sp>
+      <p:sp>
+        <p:nvSpPr>
+          <p:cNvPr id="43" name="Shape 41"/>
+          <p:cNvSpPr/>
+          <p:nvPr/>
+        </p:nvSpPr>
+        <p:spPr>
+          <a:xfrm>
+            <a:off x="7680960" y="1165860"/>
+            <a:ext cx="1062990" cy="1165860"/>
+          </a:xfrm>
+          <a:prstGeom prst="roundRect">
+            <a:avLst>
+              <a:gd name="adj" fmla="val 5161"/>
+            </a:avLst>
+          </a:prstGeom>
+          <a:solidFill>
+            <a:srgbClr val="FEF3C7"/>
+          </a:solidFill>
+          <a:ln w="25400">
+            <a:solidFill>
+              <a:srgbClr val="F59E0B"/>
+            </a:solidFill>
+            <a:prstDash val="solid"/>
+          </a:ln>
+        </p:spPr>
+      </p:sp>
+      <p:sp>
+        <p:nvSpPr>
+          <p:cNvPr id="44" name="Text 42"/>
+          <p:cNvSpPr/>
+          <p:nvPr/>
+        </p:nvSpPr>
+        <p:spPr>
+          <a:xfrm>
+            <a:off x="8538210" y="1179576"/>
+            <a:ext cx="171450" cy="137160"/>
+          </a:xfrm>
+          <a:prstGeom prst="rect">
+            <a:avLst/>
+          </a:prstGeom>
+          <a:noFill/>
+          <a:ln/>
+        </p:spPr>
+        <p:txBody>
+          <a:bodyPr wrap="square" rtlCol="0" anchor="ctr"/>
+          <a:lstStyle/>
+          <a:p>
+            <a:pPr algn="r"/>
+            <a:r>
+              <a:rPr lang="en-US" sz="675" dirty="0">
+                <a:solidFill>
+                  <a:srgbClr val="64748B"/>
+                </a:solidFill>
+              </a:rPr>
+              <a:t>7</a:t>
+            </a:r>
+            <a:endParaRPr lang="en-US" sz="675" dirty="0"/>
+          </a:p>
+        </p:txBody>
+      </p:sp>
+      <p:sp>
+        <p:nvSpPr>
+          <p:cNvPr id="45" name="Text 43"/>
+          <p:cNvSpPr/>
+          <p:nvPr/>
+        </p:nvSpPr>
+        <p:spPr>
+          <a:xfrm>
+            <a:off x="7680960" y="1268730"/>
+            <a:ext cx="1062990" cy="342900"/>
+          </a:xfrm>
+          <a:prstGeom prst="rect">
+            <a:avLst/>
+          </a:prstGeom>
+          <a:noFill/>
+          <a:ln/>
+        </p:spPr>
+        <p:txBody>
+          <a:bodyPr wrap="square" rtlCol="0" anchor="ctr"/>
+          <a:lstStyle/>
+          <a:p>
+            <a:pPr algn="ctr"/>
+            <a:r>
+              <a:rPr lang="en-US" dirty="0">
+                <a:solidFill>
+                  <a:srgbClr val="000000"/>
+                </a:solidFill>
+              </a:rPr>
+              <a:t>📊</a:t>
+            </a:r>
+            <a:endParaRPr lang="en-US" dirty="0"/>
+          </a:p>
+        </p:txBody>
+      </p:sp>
+      <p:sp>
+        <p:nvSpPr>
+          <p:cNvPr id="46" name="Text 44"/>
+          <p:cNvSpPr/>
+          <p:nvPr/>
+        </p:nvSpPr>
+        <p:spPr>
+          <a:xfrm>
+            <a:off x="7680960" y="1680210"/>
+            <a:ext cx="1062990" cy="240030"/>
+          </a:xfrm>
+          <a:prstGeom prst="rect">
+            <a:avLst/>
+          </a:prstGeom>
+          <a:noFill/>
+          <a:ln/>
+        </p:spPr>
+        <p:txBody>
+          <a:bodyPr wrap="square" rtlCol="0" anchor="ctr"/>
+          <a:lstStyle/>
+          <a:p>
+            <a:pPr algn="ctr"/>
+            <a:r>
+              <a:rPr lang="en-US" sz="825" b="1" dirty="0">
+                <a:solidFill>
+                  <a:srgbClr val="0F172A"/>
+                </a:solidFill>
+              </a:rPr>
+              <a:t>Power BI</a:t>
+            </a:r>
+            <a:endParaRPr lang="en-US" sz="825" dirty="0"/>
+          </a:p>
+        </p:txBody>
+      </p:sp>
+      <p:sp>
+        <p:nvSpPr>
+          <p:cNvPr id="47" name="Text 45"/>
+          <p:cNvSpPr/>
+          <p:nvPr/>
+        </p:nvSpPr>
+        <p:spPr>
+          <a:xfrm>
+            <a:off x="7680960" y="1920240"/>
+            <a:ext cx="1062990" cy="342900"/>
+          </a:xfrm>
+          <a:prstGeom prst="rect">
+            <a:avLst/>
+          </a:prstGeom>
+          <a:noFill/>
+          <a:ln/>
+        </p:spPr>
+        <p:txBody>
+          <a:bodyPr wrap="square" rtlCol="0" anchor="ctr"/>
+          <a:lstStyle/>
+          <a:p>
+            <a:pPr algn="ctr"/>
+            <a:r>
+              <a:rPr lang="en-US" sz="675" b="1" dirty="0">
+                <a:solidFill>
+                  <a:srgbClr val="B45309"/>
+                </a:solidFill>
+              </a:rPr>
+              <a:t>Dashboard</a:t>
+            </a:r>
+            <a:endParaRPr lang="en-US" sz="675" dirty="0"/>
+          </a:p>
+        </p:txBody>
+      </p:sp>
+      <p:sp>
+        <p:nvSpPr>
+          <p:cNvPr id="48" name="Shape 46"/>
+          <p:cNvSpPr/>
+          <p:nvPr/>
+        </p:nvSpPr>
+        <p:spPr>
+          <a:xfrm>
+            <a:off x="274320" y="2537460"/>
+            <a:ext cx="8572500" cy="377190"/>
+          </a:xfrm>
+          <a:prstGeom prst="roundRect">
+            <a:avLst>
+              <a:gd name="adj" fmla="val 14545"/>
+            </a:avLst>
+          </a:prstGeom>
+          <a:solidFill>
+            <a:srgbClr val="FAE8FF"/>
           </a:solidFill>
           <a:ln w="12700">
             <a:solidFill>
-              <a:srgbClr val="0D1B2A"/>
+              <a:srgbClr val="D946EF"/>
             </a:solidFill>
             <a:prstDash val="solid"/>
           </a:ln>
-          <a:effectLst>
-            <a:outerShdw blurRad="101600" dist="38100" dir="8100000" algn="bl" rotWithShape="0">
-              <a:srgbClr val="000000">
-                <a:alpha val="12000"/>
-              </a:srgbClr>
-            </a:outerShdw>
-          </a:effectLst>
-        </p:spPr>
-      </p:sp>
-      <p:sp>
-        <p:nvSpPr>
-          <p:cNvPr id="6" name="Text 4"/>
-          <p:cNvSpPr/>
-          <p:nvPr/>
-        </p:nvSpPr>
-        <p:spPr>
-          <a:xfrm>
-            <a:off x="502920" y="960120"/>
-            <a:ext cx="8138160" cy="914400"/>
+        </p:spPr>
+      </p:sp>
+      <p:sp>
+        <p:nvSpPr>
+          <p:cNvPr id="49" name="Text 47"/>
+          <p:cNvSpPr/>
+          <p:nvPr/>
+        </p:nvSpPr>
+        <p:spPr>
+          <a:xfrm>
+            <a:off x="274320" y="2537460"/>
+            <a:ext cx="8572500" cy="377190"/>
           </a:xfrm>
           <a:prstGeom prst="rect">
             <a:avLst/>
@@ -14765,747 +15055,457 @@
           <a:bodyPr wrap="square" rtlCol="0" anchor="ctr"/>
           <a:lstStyle/>
           <a:p>
-            <a:pPr marL="0" indent="0">
-              <a:buNone/>
-            </a:pPr>
-            <a:r>
-              <a:rPr lang="en-US" sz="1400" b="1" dirty="0">
-                <a:solidFill>
-                  <a:srgbClr val="00B4D8"/>
-                </a:solidFill>
-              </a:rPr>
-              <a:t>Analytical Question: </a:t>
-            </a:r>
-            <a:r>
-              <a:rPr lang="en-US" sz="1400" dirty="0">
-                <a:solidFill>
-                  <a:srgbClr val="FFFFFF"/>
-                </a:solidFill>
-              </a:rPr>
-              <a:t>How is Stockholm's public transport network distributed across the city and which stops are busiest?</a:t>
-            </a:r>
-            <a:endParaRPr lang="en-US" sz="1400" dirty="0"/>
-          </a:p>
-        </p:txBody>
-      </p:sp>
-      <p:sp>
-        <p:nvSpPr>
-          <p:cNvPr id="7" name="Shape 5"/>
-          <p:cNvSpPr/>
-          <p:nvPr/>
-        </p:nvSpPr>
-        <p:spPr>
-          <a:xfrm>
-            <a:off x="365760" y="2103120"/>
-            <a:ext cx="1965960" cy="1417320"/>
-          </a:xfrm>
-          <a:prstGeom prst="rect">
-            <a:avLst/>
+            <a:pPr algn="ctr"/>
+            <a:r>
+              <a:rPr lang="en-US" sz="900" b="1" dirty="0">
+                <a:solidFill>
+                  <a:srgbClr val="000000"/>
+                </a:solidFill>
+              </a:rPr>
+              <a:t>❄  ⇆  📊   </a:t>
+            </a:r>
+            <a:r>
+              <a:rPr lang="en-US" sz="900" b="1" dirty="0">
+                <a:solidFill>
+                  <a:srgbClr val="1E293B"/>
+                </a:solidFill>
+              </a:rPr>
+              <a:t>Power BI connects directly to Snowflake </a:t>
+            </a:r>
+            <a:r>
+              <a:rPr lang="en-US" sz="900" dirty="0">
+                <a:solidFill>
+                  <a:srgbClr val="475569"/>
+                </a:solidFill>
+              </a:rPr>
+              <a:t>— reads Gold-layer tables for reporting</a:t>
+            </a:r>
+            <a:endParaRPr lang="en-US" sz="900" dirty="0"/>
+          </a:p>
+        </p:txBody>
+      </p:sp>
+      <p:sp>
+        <p:nvSpPr>
+          <p:cNvPr id="50" name="Shape 48"/>
+          <p:cNvSpPr/>
+          <p:nvPr/>
+        </p:nvSpPr>
+        <p:spPr>
+          <a:xfrm>
+            <a:off x="274320" y="3017520"/>
+            <a:ext cx="8572500" cy="342900"/>
+          </a:xfrm>
+          <a:prstGeom prst="roundRect">
+            <a:avLst>
+              <a:gd name="adj" fmla="val 12000"/>
+            </a:avLst>
+          </a:prstGeom>
+          <a:solidFill>
+            <a:srgbClr val="F1F5F9"/>
+          </a:solidFill>
+          <a:ln w="12700">
+            <a:solidFill>
+              <a:srgbClr val="CBD5E1"/>
+            </a:solidFill>
+            <a:prstDash val="solid"/>
+          </a:ln>
+        </p:spPr>
+      </p:sp>
+      <p:sp>
+        <p:nvSpPr>
+          <p:cNvPr id="51" name="Text 49"/>
+          <p:cNvSpPr/>
+          <p:nvPr/>
+        </p:nvSpPr>
+        <p:spPr>
+          <a:xfrm>
+            <a:off x="274320" y="3017520"/>
+            <a:ext cx="8572500" cy="342900"/>
+          </a:xfrm>
+          <a:prstGeom prst="rect">
+            <a:avLst/>
+          </a:prstGeom>
+          <a:noFill/>
+          <a:ln/>
+        </p:spPr>
+        <p:txBody>
+          <a:bodyPr wrap="square" rtlCol="0" anchor="ctr"/>
+          <a:lstStyle/>
+          <a:p>
+            <a:pPr algn="ctr"/>
+            <a:r>
+              <a:rPr lang="en-US" sz="825" b="1" dirty="0">
+                <a:solidFill>
+                  <a:srgbClr val="334155"/>
+                </a:solidFill>
+              </a:rPr>
+              <a:t>Why batch? </a:t>
+            </a:r>
+            <a:r>
+              <a:rPr lang="en-US" sz="825" dirty="0">
+                <a:solidFill>
+                  <a:srgbClr val="64748B"/>
+                </a:solidFill>
+              </a:rPr>
+              <a:t>— Static stop data updates once daily. Scheduled batch ingestion is efficient, cost-effective and aligned with Trafiklab's update frequency.</a:t>
+            </a:r>
+            <a:endParaRPr lang="en-US" sz="825" dirty="0"/>
+          </a:p>
+        </p:txBody>
+      </p:sp>
+      <p:sp>
+        <p:nvSpPr>
+          <p:cNvPr id="52" name="Shape 50"/>
+          <p:cNvSpPr/>
+          <p:nvPr/>
+        </p:nvSpPr>
+        <p:spPr>
+          <a:xfrm>
+            <a:off x="274320" y="3463290"/>
+            <a:ext cx="8572500" cy="1543050"/>
+          </a:xfrm>
+          <a:prstGeom prst="roundRect">
+            <a:avLst>
+              <a:gd name="adj" fmla="val 3556"/>
+            </a:avLst>
           </a:prstGeom>
           <a:solidFill>
             <a:srgbClr val="FFFFFF"/>
           </a:solidFill>
           <a:ln w="12700">
             <a:solidFill>
-              <a:srgbClr val="D0DCE8"/>
+              <a:srgbClr val="E2E8F0"/>
             </a:solidFill>
             <a:prstDash val="solid"/>
           </a:ln>
-          <a:effectLst>
-            <a:outerShdw blurRad="76200" dist="25400" dir="8100000" algn="bl" rotWithShape="0">
-              <a:srgbClr val="000000">
-                <a:alpha val="8000"/>
-              </a:srgbClr>
-            </a:outerShdw>
-          </a:effectLst>
-        </p:spPr>
-      </p:sp>
-      <p:sp>
-        <p:nvSpPr>
-          <p:cNvPr id="8" name="Shape 6"/>
-          <p:cNvSpPr/>
-          <p:nvPr/>
-        </p:nvSpPr>
-        <p:spPr>
-          <a:xfrm>
-            <a:off x="365760" y="2103120"/>
-            <a:ext cx="1965960" cy="64008"/>
-          </a:xfrm>
-          <a:prstGeom prst="rect">
-            <a:avLst/>
-          </a:prstGeom>
-          <a:solidFill>
-            <a:srgbClr val="00B4D8"/>
-          </a:solidFill>
-          <a:ln w="12700">
-            <a:solidFill>
-              <a:srgbClr val="00B4D8"/>
-            </a:solidFill>
-            <a:prstDash val="solid"/>
-          </a:ln>
-        </p:spPr>
-      </p:sp>
-      <p:sp>
-        <p:nvSpPr>
-          <p:cNvPr id="9" name="Text 7"/>
-          <p:cNvSpPr/>
-          <p:nvPr/>
-        </p:nvSpPr>
-        <p:spPr>
-          <a:xfrm>
-            <a:off x="365760" y="2194560"/>
-            <a:ext cx="1965960" cy="457200"/>
-          </a:xfrm>
-          <a:prstGeom prst="rect">
-            <a:avLst/>
-          </a:prstGeom>
-          <a:noFill/>
-          <a:ln/>
-        </p:spPr>
-        <p:txBody>
-          <a:bodyPr wrap="square" lIns="0" tIns="0" rIns="0" bIns="0" rtlCol="0" anchor="ctr"/>
-          <a:lstStyle/>
-          <a:p>
-            <a:pPr marL="0" indent="0" algn="ctr">
-              <a:buNone/>
-            </a:pPr>
-            <a:r>
-              <a:rPr lang="en-US" sz="2200" dirty="0">
-                <a:solidFill>
-                  <a:srgbClr val="000000"/>
-                </a:solidFill>
-              </a:rPr>
-              <a:t>📍</a:t>
-            </a:r>
-            <a:endParaRPr lang="en-US" sz="2200" dirty="0"/>
-          </a:p>
-        </p:txBody>
-      </p:sp>
-      <p:sp>
-        <p:nvSpPr>
-          <p:cNvPr id="10" name="Text 8"/>
-          <p:cNvSpPr/>
-          <p:nvPr/>
-        </p:nvSpPr>
-        <p:spPr>
-          <a:xfrm>
-            <a:off x="365760" y="2633472"/>
-            <a:ext cx="1965960" cy="457200"/>
-          </a:xfrm>
-          <a:prstGeom prst="rect">
-            <a:avLst/>
-          </a:prstGeom>
-          <a:noFill/>
-          <a:ln/>
-        </p:spPr>
-        <p:txBody>
-          <a:bodyPr wrap="square" lIns="0" tIns="0" rIns="0" bIns="0" rtlCol="0" anchor="ctr"/>
-          <a:lstStyle/>
-          <a:p>
-            <a:pPr marL="0" indent="0" algn="ctr">
-              <a:buNone/>
-            </a:pPr>
-            <a:r>
-              <a:rPr lang="en-US" sz="2200" b="1" dirty="0">
-                <a:solidFill>
-                  <a:srgbClr val="0D1B2A"/>
-                </a:solidFill>
-              </a:rPr>
-              <a:t>21,829</a:t>
-            </a:r>
-            <a:endParaRPr lang="en-US" sz="2200" dirty="0"/>
-          </a:p>
-        </p:txBody>
-      </p:sp>
-      <p:sp>
-        <p:nvSpPr>
-          <p:cNvPr id="11" name="Text 9"/>
-          <p:cNvSpPr/>
-          <p:nvPr/>
-        </p:nvSpPr>
-        <p:spPr>
-          <a:xfrm>
-            <a:off x="365760" y="3063240"/>
-            <a:ext cx="1965960" cy="347472"/>
-          </a:xfrm>
-          <a:prstGeom prst="rect">
-            <a:avLst/>
-          </a:prstGeom>
-          <a:noFill/>
-          <a:ln/>
-        </p:spPr>
-        <p:txBody>
-          <a:bodyPr wrap="square" lIns="0" tIns="0" rIns="0" bIns="0" rtlCol="0" anchor="ctr"/>
-          <a:lstStyle/>
-          <a:p>
-            <a:pPr marL="0" indent="0" algn="ctr">
-              <a:buNone/>
-            </a:pPr>
-            <a:r>
-              <a:rPr lang="en-US" sz="1000" dirty="0">
-                <a:solidFill>
-                  <a:srgbClr val="8FA3B1"/>
-                </a:solidFill>
-              </a:rPr>
-              <a:t>Transport Stops</a:t>
-            </a:r>
-            <a:endParaRPr lang="en-US" sz="1000" dirty="0"/>
-          </a:p>
-        </p:txBody>
-      </p:sp>
-      <p:sp>
-        <p:nvSpPr>
-          <p:cNvPr id="12" name="Shape 10"/>
-          <p:cNvSpPr/>
-          <p:nvPr/>
-        </p:nvSpPr>
-        <p:spPr>
-          <a:xfrm>
-            <a:off x="2514600" y="2103120"/>
-            <a:ext cx="1965960" cy="1417320"/>
-          </a:xfrm>
-          <a:prstGeom prst="rect">
-            <a:avLst/>
-          </a:prstGeom>
-          <a:solidFill>
-            <a:srgbClr val="FFFFFF"/>
-          </a:solidFill>
-          <a:ln w="12700">
-            <a:solidFill>
-              <a:srgbClr val="D0DCE8"/>
-            </a:solidFill>
-            <a:prstDash val="solid"/>
-          </a:ln>
-          <a:effectLst>
-            <a:outerShdw blurRad="76200" dist="25400" dir="8100000" algn="bl" rotWithShape="0">
-              <a:srgbClr val="000000">
-                <a:alpha val="8000"/>
-              </a:srgbClr>
-            </a:outerShdw>
-          </a:effectLst>
-        </p:spPr>
-      </p:sp>
-      <p:sp>
-        <p:nvSpPr>
-          <p:cNvPr id="13" name="Shape 11"/>
-          <p:cNvSpPr/>
-          <p:nvPr/>
-        </p:nvSpPr>
-        <p:spPr>
-          <a:xfrm>
-            <a:off x="2514600" y="2103120"/>
-            <a:ext cx="1965960" cy="64008"/>
-          </a:xfrm>
-          <a:prstGeom prst="rect">
-            <a:avLst/>
-          </a:prstGeom>
-          <a:solidFill>
-            <a:srgbClr val="00B4D8"/>
-          </a:solidFill>
-          <a:ln w="12700">
-            <a:solidFill>
-              <a:srgbClr val="00B4D8"/>
-            </a:solidFill>
-            <a:prstDash val="solid"/>
-          </a:ln>
-        </p:spPr>
-      </p:sp>
-      <p:sp>
-        <p:nvSpPr>
-          <p:cNvPr id="14" name="Text 12"/>
-          <p:cNvSpPr/>
-          <p:nvPr/>
-        </p:nvSpPr>
-        <p:spPr>
-          <a:xfrm>
-            <a:off x="2514600" y="2194560"/>
-            <a:ext cx="1965960" cy="457200"/>
-          </a:xfrm>
-          <a:prstGeom prst="rect">
-            <a:avLst/>
-          </a:prstGeom>
-          <a:noFill/>
-          <a:ln/>
-        </p:spPr>
-        <p:txBody>
-          <a:bodyPr wrap="square" lIns="0" tIns="0" rIns="0" bIns="0" rtlCol="0" anchor="ctr"/>
-          <a:lstStyle/>
-          <a:p>
-            <a:pPr marL="0" indent="0" algn="ctr">
-              <a:buNone/>
-            </a:pPr>
-            <a:r>
-              <a:rPr lang="en-US" sz="2200" dirty="0">
-                <a:solidFill>
-                  <a:srgbClr val="000000"/>
-                </a:solidFill>
-              </a:rPr>
-              <a:t>🚌</a:t>
-            </a:r>
-            <a:endParaRPr lang="en-US" sz="2200" dirty="0"/>
-          </a:p>
-        </p:txBody>
-      </p:sp>
-      <p:sp>
-        <p:nvSpPr>
-          <p:cNvPr id="15" name="Text 13"/>
-          <p:cNvSpPr/>
-          <p:nvPr/>
-        </p:nvSpPr>
-        <p:spPr>
-          <a:xfrm>
-            <a:off x="2514600" y="2633472"/>
-            <a:ext cx="1965960" cy="457200"/>
-          </a:xfrm>
-          <a:prstGeom prst="rect">
-            <a:avLst/>
-          </a:prstGeom>
-          <a:noFill/>
-          <a:ln/>
-        </p:spPr>
-        <p:txBody>
-          <a:bodyPr wrap="square" lIns="0" tIns="0" rIns="0" bIns="0" rtlCol="0" anchor="ctr"/>
-          <a:lstStyle/>
-          <a:p>
-            <a:pPr marL="0" indent="0" algn="ctr">
-              <a:buNone/>
-            </a:pPr>
-            <a:r>
-              <a:rPr lang="en-US" sz="2200" b="1" dirty="0">
-                <a:solidFill>
-                  <a:srgbClr val="0D1B2A"/>
-                </a:solidFill>
-              </a:rPr>
-              <a:t>614</a:t>
-            </a:r>
-            <a:endParaRPr lang="en-US" sz="2200" dirty="0"/>
-          </a:p>
-        </p:txBody>
-      </p:sp>
-      <p:sp>
-        <p:nvSpPr>
-          <p:cNvPr id="16" name="Text 14"/>
-          <p:cNvSpPr/>
-          <p:nvPr/>
-        </p:nvSpPr>
-        <p:spPr>
-          <a:xfrm>
-            <a:off x="2514600" y="3063240"/>
-            <a:ext cx="1965960" cy="347472"/>
-          </a:xfrm>
-          <a:prstGeom prst="rect">
-            <a:avLst/>
-          </a:prstGeom>
-          <a:noFill/>
-          <a:ln/>
-        </p:spPr>
-        <p:txBody>
-          <a:bodyPr wrap="square" lIns="0" tIns="0" rIns="0" bIns="0" rtlCol="0" anchor="ctr"/>
-          <a:lstStyle/>
-          <a:p>
-            <a:pPr marL="0" indent="0" algn="ctr">
-              <a:buNone/>
-            </a:pPr>
-            <a:r>
-              <a:rPr lang="en-US" sz="1000" dirty="0">
-                <a:solidFill>
-                  <a:srgbClr val="8FA3B1"/>
-                </a:solidFill>
-              </a:rPr>
-              <a:t>Routes</a:t>
-            </a:r>
-            <a:endParaRPr lang="en-US" sz="1000" dirty="0"/>
-          </a:p>
-        </p:txBody>
-      </p:sp>
-      <p:sp>
-        <p:nvSpPr>
-          <p:cNvPr id="17" name="Shape 15"/>
-          <p:cNvSpPr/>
-          <p:nvPr/>
-        </p:nvSpPr>
-        <p:spPr>
-          <a:xfrm>
-            <a:off x="4663440" y="2103120"/>
-            <a:ext cx="1965960" cy="1417320"/>
-          </a:xfrm>
-          <a:prstGeom prst="rect">
-            <a:avLst/>
-          </a:prstGeom>
-          <a:solidFill>
-            <a:srgbClr val="FFFFFF"/>
-          </a:solidFill>
-          <a:ln w="12700">
-            <a:solidFill>
-              <a:srgbClr val="D0DCE8"/>
-            </a:solidFill>
-            <a:prstDash val="solid"/>
-          </a:ln>
-          <a:effectLst>
-            <a:outerShdw blurRad="76200" dist="25400" dir="8100000" algn="bl" rotWithShape="0">
-              <a:srgbClr val="000000">
-                <a:alpha val="8000"/>
-              </a:srgbClr>
-            </a:outerShdw>
-          </a:effectLst>
-        </p:spPr>
-      </p:sp>
-      <p:sp>
-        <p:nvSpPr>
-          <p:cNvPr id="18" name="Shape 16"/>
-          <p:cNvSpPr/>
-          <p:nvPr/>
-        </p:nvSpPr>
-        <p:spPr>
-          <a:xfrm>
-            <a:off x="4663440" y="2103120"/>
-            <a:ext cx="1965960" cy="64008"/>
-          </a:xfrm>
-          <a:prstGeom prst="rect">
-            <a:avLst/>
-          </a:prstGeom>
-          <a:solidFill>
-            <a:srgbClr val="00B4D8"/>
-          </a:solidFill>
-          <a:ln w="12700">
-            <a:solidFill>
-              <a:srgbClr val="00B4D8"/>
-            </a:solidFill>
-            <a:prstDash val="solid"/>
-          </a:ln>
-        </p:spPr>
-      </p:sp>
-      <p:sp>
-        <p:nvSpPr>
-          <p:cNvPr id="19" name="Text 17"/>
-          <p:cNvSpPr/>
-          <p:nvPr/>
-        </p:nvSpPr>
-        <p:spPr>
-          <a:xfrm>
-            <a:off x="4663440" y="2194560"/>
-            <a:ext cx="1965960" cy="457200"/>
-          </a:xfrm>
-          <a:prstGeom prst="rect">
-            <a:avLst/>
-          </a:prstGeom>
-          <a:noFill/>
-          <a:ln/>
-        </p:spPr>
-        <p:txBody>
-          <a:bodyPr wrap="square" lIns="0" tIns="0" rIns="0" bIns="0" rtlCol="0" anchor="ctr"/>
-          <a:lstStyle/>
-          <a:p>
-            <a:pPr marL="0" indent="0" algn="ctr">
-              <a:buNone/>
-            </a:pPr>
-            <a:r>
-              <a:rPr lang="en-US" sz="2200" dirty="0">
-                <a:solidFill>
-                  <a:srgbClr val="000000"/>
-                </a:solidFill>
-              </a:rPr>
-              <a:t>🕐</a:t>
-            </a:r>
-            <a:endParaRPr lang="en-US" sz="2200" dirty="0"/>
-          </a:p>
-        </p:txBody>
-      </p:sp>
-      <p:sp>
-        <p:nvSpPr>
-          <p:cNvPr id="20" name="Text 18"/>
-          <p:cNvSpPr/>
-          <p:nvPr/>
-        </p:nvSpPr>
-        <p:spPr>
-          <a:xfrm>
-            <a:off x="4663440" y="2633472"/>
-            <a:ext cx="1965960" cy="457200"/>
-          </a:xfrm>
-          <a:prstGeom prst="rect">
-            <a:avLst/>
-          </a:prstGeom>
-          <a:noFill/>
-          <a:ln/>
-        </p:spPr>
-        <p:txBody>
-          <a:bodyPr wrap="square" lIns="0" tIns="0" rIns="0" bIns="0" rtlCol="0" anchor="ctr"/>
-          <a:lstStyle/>
-          <a:p>
-            <a:pPr marL="0" indent="0" algn="ctr">
-              <a:buNone/>
-            </a:pPr>
-            <a:r>
-              <a:rPr lang="en-US" sz="2200" b="1" dirty="0">
-                <a:solidFill>
-                  <a:srgbClr val="0D1B2A"/>
-                </a:solidFill>
-              </a:rPr>
-              <a:t>2.78M</a:t>
-            </a:r>
-            <a:endParaRPr lang="en-US" sz="2200" dirty="0"/>
-          </a:p>
-        </p:txBody>
-      </p:sp>
-      <p:sp>
-        <p:nvSpPr>
-          <p:cNvPr id="21" name="Text 19"/>
-          <p:cNvSpPr/>
-          <p:nvPr/>
-        </p:nvSpPr>
-        <p:spPr>
-          <a:xfrm>
-            <a:off x="4663440" y="3063240"/>
-            <a:ext cx="1965960" cy="347472"/>
-          </a:xfrm>
-          <a:prstGeom prst="rect">
-            <a:avLst/>
-          </a:prstGeom>
-          <a:noFill/>
-          <a:ln/>
-        </p:spPr>
-        <p:txBody>
-          <a:bodyPr wrap="square" lIns="0" tIns="0" rIns="0" bIns="0" rtlCol="0" anchor="ctr"/>
-          <a:lstStyle/>
-          <a:p>
-            <a:pPr marL="0" indent="0" algn="ctr">
-              <a:buNone/>
-            </a:pPr>
-            <a:r>
-              <a:rPr lang="en-US" sz="1000" dirty="0">
-                <a:solidFill>
-                  <a:srgbClr val="8FA3B1"/>
-                </a:solidFill>
-              </a:rPr>
-              <a:t>Scheduled Departures</a:t>
-            </a:r>
-            <a:endParaRPr lang="en-US" sz="1000" dirty="0"/>
-          </a:p>
-        </p:txBody>
-      </p:sp>
-      <p:sp>
-        <p:nvSpPr>
-          <p:cNvPr id="22" name="Shape 20"/>
-          <p:cNvSpPr/>
-          <p:nvPr/>
-        </p:nvSpPr>
-        <p:spPr>
-          <a:xfrm>
-            <a:off x="6812280" y="2103120"/>
-            <a:ext cx="1965960" cy="1417320"/>
-          </a:xfrm>
-          <a:prstGeom prst="rect">
-            <a:avLst/>
-          </a:prstGeom>
-          <a:solidFill>
-            <a:srgbClr val="FFFFFF"/>
-          </a:solidFill>
-          <a:ln w="12700">
-            <a:solidFill>
-              <a:srgbClr val="D0DCE8"/>
-            </a:solidFill>
-            <a:prstDash val="solid"/>
-          </a:ln>
-          <a:effectLst>
-            <a:outerShdw blurRad="76200" dist="25400" dir="8100000" algn="bl" rotWithShape="0">
-              <a:srgbClr val="000000">
-                <a:alpha val="8000"/>
-              </a:srgbClr>
-            </a:outerShdw>
-          </a:effectLst>
-        </p:spPr>
-      </p:sp>
-      <p:sp>
-        <p:nvSpPr>
-          <p:cNvPr id="23" name="Shape 21"/>
-          <p:cNvSpPr/>
-          <p:nvPr/>
-        </p:nvSpPr>
-        <p:spPr>
-          <a:xfrm>
-            <a:off x="6812280" y="2103120"/>
-            <a:ext cx="1965960" cy="64008"/>
-          </a:xfrm>
-          <a:prstGeom prst="rect">
-            <a:avLst/>
-          </a:prstGeom>
-          <a:solidFill>
-            <a:srgbClr val="00B4D8"/>
-          </a:solidFill>
-          <a:ln w="12700">
-            <a:solidFill>
-              <a:srgbClr val="00B4D8"/>
-            </a:solidFill>
-            <a:prstDash val="solid"/>
-          </a:ln>
-        </p:spPr>
-      </p:sp>
-      <p:sp>
-        <p:nvSpPr>
-          <p:cNvPr id="24" name="Text 22"/>
-          <p:cNvSpPr/>
-          <p:nvPr/>
-        </p:nvSpPr>
-        <p:spPr>
-          <a:xfrm>
-            <a:off x="6812280" y="2194560"/>
-            <a:ext cx="1965960" cy="457200"/>
-          </a:xfrm>
-          <a:prstGeom prst="rect">
-            <a:avLst/>
-          </a:prstGeom>
-          <a:noFill/>
-          <a:ln/>
-        </p:spPr>
-        <p:txBody>
-          <a:bodyPr wrap="square" lIns="0" tIns="0" rIns="0" bIns="0" rtlCol="0" anchor="ctr"/>
-          <a:lstStyle/>
-          <a:p>
-            <a:pPr marL="0" indent="0" algn="ctr">
-              <a:buNone/>
-            </a:pPr>
-            <a:r>
-              <a:rPr lang="en-US" sz="2200" dirty="0">
-                <a:solidFill>
-                  <a:srgbClr val="000000"/>
-                </a:solidFill>
-              </a:rPr>
-              <a:t>🚇</a:t>
-            </a:r>
-            <a:endParaRPr lang="en-US" sz="2200" dirty="0"/>
-          </a:p>
-        </p:txBody>
-      </p:sp>
-      <p:sp>
-        <p:nvSpPr>
-          <p:cNvPr id="25" name="Text 23"/>
-          <p:cNvSpPr/>
-          <p:nvPr/>
-        </p:nvSpPr>
-        <p:spPr>
-          <a:xfrm>
-            <a:off x="6812280" y="2633472"/>
-            <a:ext cx="1965960" cy="457200"/>
-          </a:xfrm>
-          <a:prstGeom prst="rect">
-            <a:avLst/>
-          </a:prstGeom>
-          <a:noFill/>
-          <a:ln/>
-        </p:spPr>
-        <p:txBody>
-          <a:bodyPr wrap="square" lIns="0" tIns="0" rIns="0" bIns="0" rtlCol="0" anchor="ctr"/>
-          <a:lstStyle/>
-          <a:p>
-            <a:pPr marL="0" indent="0" algn="ctr">
-              <a:buNone/>
-            </a:pPr>
-            <a:r>
-              <a:rPr lang="en-US" sz="2200" b="1" dirty="0">
-                <a:solidFill>
-                  <a:srgbClr val="0D1B2A"/>
-                </a:solidFill>
-              </a:rPr>
-              <a:t>5</a:t>
-            </a:r>
-            <a:endParaRPr lang="en-US" sz="2200" dirty="0"/>
-          </a:p>
-        </p:txBody>
-      </p:sp>
-      <p:sp>
-        <p:nvSpPr>
-          <p:cNvPr id="26" name="Text 24"/>
-          <p:cNvSpPr/>
-          <p:nvPr/>
-        </p:nvSpPr>
-        <p:spPr>
-          <a:xfrm>
-            <a:off x="6812280" y="3063240"/>
-            <a:ext cx="1965960" cy="347472"/>
-          </a:xfrm>
-          <a:prstGeom prst="rect">
-            <a:avLst/>
-          </a:prstGeom>
-          <a:noFill/>
-          <a:ln/>
-        </p:spPr>
-        <p:txBody>
-          <a:bodyPr wrap="square" lIns="0" tIns="0" rIns="0" bIns="0" rtlCol="0" anchor="ctr"/>
-          <a:lstStyle/>
-          <a:p>
-            <a:pPr marL="0" indent="0" algn="ctr">
-              <a:buNone/>
-            </a:pPr>
-            <a:r>
-              <a:rPr lang="en-US" sz="1000" dirty="0">
-                <a:solidFill>
-                  <a:srgbClr val="8FA3B1"/>
-                </a:solidFill>
-              </a:rPr>
-              <a:t>Transport Modes</a:t>
-            </a:r>
-            <a:endParaRPr lang="en-US" sz="1000" dirty="0"/>
-          </a:p>
-        </p:txBody>
-      </p:sp>
-      <p:sp>
-        <p:nvSpPr>
-          <p:cNvPr id="27" name="Shape 25"/>
-          <p:cNvSpPr/>
-          <p:nvPr/>
-        </p:nvSpPr>
-        <p:spPr>
-          <a:xfrm>
-            <a:off x="365760" y="3749040"/>
-            <a:ext cx="8412480" cy="502920"/>
-          </a:xfrm>
-          <a:prstGeom prst="rect">
-            <a:avLst/>
-          </a:prstGeom>
-          <a:solidFill>
-            <a:srgbClr val="E8F4FD"/>
-          </a:solidFill>
-          <a:ln w="12700">
-            <a:solidFill>
-              <a:srgbClr val="90E0EF"/>
-            </a:solidFill>
-            <a:prstDash val="solid"/>
-          </a:ln>
-        </p:spPr>
-      </p:sp>
-      <p:sp>
-        <p:nvSpPr>
-          <p:cNvPr id="28" name="Text 26"/>
-          <p:cNvSpPr/>
-          <p:nvPr/>
-        </p:nvSpPr>
-        <p:spPr>
-          <a:xfrm>
-            <a:off x="457200" y="3749040"/>
-            <a:ext cx="8229600" cy="502920"/>
-          </a:xfrm>
-          <a:prstGeom prst="rect">
-            <a:avLst/>
-          </a:prstGeom>
-          <a:noFill/>
-          <a:ln/>
-        </p:spPr>
-        <p:txBody>
-          <a:bodyPr wrap="square" lIns="0" tIns="0" rIns="0" bIns="0" rtlCol="0" anchor="ctr"/>
-          <a:lstStyle/>
-          <a:p>
-            <a:pPr marL="0" indent="0">
-              <a:buNone/>
-            </a:pPr>
-            <a:r>
-              <a:rPr lang="en-US" sz="1100" dirty="0">
-                <a:solidFill>
-                  <a:srgbClr val="4A6278"/>
-                </a:solidFill>
-              </a:rPr>
-              <a:t>Data Source: Trafiklab (GTFS Regional Static API) — Sweden's official public transport open data platform</a:t>
-            </a:r>
-            <a:endParaRPr lang="en-US" sz="1100" dirty="0"/>
+        </p:spPr>
+      </p:sp>
+      <p:sp>
+        <p:nvSpPr>
+          <p:cNvPr id="53" name="Text 51"/>
+          <p:cNvSpPr/>
+          <p:nvPr/>
+        </p:nvSpPr>
+        <p:spPr>
+          <a:xfrm>
+            <a:off x="411480" y="3511296"/>
+            <a:ext cx="8229600" cy="240030"/>
+          </a:xfrm>
+          <a:prstGeom prst="rect">
+            <a:avLst/>
+          </a:prstGeom>
+          <a:noFill/>
+          <a:ln/>
+        </p:spPr>
+        <p:txBody>
+          <a:bodyPr wrap="square" rtlCol="0" anchor="ctr"/>
+          <a:lstStyle/>
+          <a:p>
+            <a:r>
+              <a:rPr lang="en-US" sz="1050" b="1" dirty="0">
+                <a:solidFill>
+                  <a:srgbClr val="0E7490"/>
+                </a:solidFill>
+              </a:rPr>
+              <a:t>Architectural Decisions</a:t>
+            </a:r>
+            <a:endParaRPr lang="en-US" sz="1050" dirty="0"/>
+          </a:p>
+        </p:txBody>
+      </p:sp>
+      <p:sp>
+        <p:nvSpPr>
+          <p:cNvPr id="54" name="Text 52"/>
+          <p:cNvSpPr/>
+          <p:nvPr/>
+        </p:nvSpPr>
+        <p:spPr>
+          <a:xfrm>
+            <a:off x="411480" y="3806190"/>
+            <a:ext cx="240030" cy="274320"/>
+          </a:xfrm>
+          <a:prstGeom prst="rect">
+            <a:avLst/>
+          </a:prstGeom>
+          <a:noFill/>
+          <a:ln/>
+        </p:spPr>
+        <p:txBody>
+          <a:bodyPr wrap="square" rtlCol="0" anchor="ctr"/>
+          <a:lstStyle/>
+          <a:p>
+            <a:r>
+              <a:rPr lang="en-US" sz="1050" dirty="0">
+                <a:solidFill>
+                  <a:srgbClr val="D97706"/>
+                </a:solidFill>
+              </a:rPr>
+              <a:t>🔒</a:t>
+            </a:r>
+            <a:endParaRPr lang="en-US" sz="1050" dirty="0"/>
+          </a:p>
+        </p:txBody>
+      </p:sp>
+      <p:sp>
+        <p:nvSpPr>
+          <p:cNvPr id="55" name="Text 53"/>
+          <p:cNvSpPr/>
+          <p:nvPr/>
+        </p:nvSpPr>
+        <p:spPr>
+          <a:xfrm>
+            <a:off x="685800" y="3806190"/>
+            <a:ext cx="3840480" cy="480060"/>
+          </a:xfrm>
+          <a:prstGeom prst="rect">
+            <a:avLst/>
+          </a:prstGeom>
+          <a:noFill/>
+          <a:ln/>
+        </p:spPr>
+        <p:txBody>
+          <a:bodyPr wrap="square" rtlCol="0" anchor="t"/>
+          <a:lstStyle/>
+          <a:p>
+            <a:r>
+              <a:rPr lang="en-US" sz="750" b="1" dirty="0">
+                <a:solidFill>
+                  <a:srgbClr val="0F172A"/>
+                </a:solidFill>
+              </a:rPr>
+              <a:t>Key Vault </a:t>
+            </a:r>
+            <a:r>
+              <a:rPr lang="en-US" sz="750" dirty="0">
+                <a:solidFill>
+                  <a:srgbClr val="475569"/>
+                </a:solidFill>
+              </a:rPr>
+              <a:t>— all credentials stored centrally, never hardcoded in any script or pipeline</a:t>
+            </a:r>
+            <a:endParaRPr lang="en-US" sz="750" dirty="0"/>
+          </a:p>
+        </p:txBody>
+      </p:sp>
+      <p:sp>
+        <p:nvSpPr>
+          <p:cNvPr id="56" name="Text 54"/>
+          <p:cNvSpPr/>
+          <p:nvPr/>
+        </p:nvSpPr>
+        <p:spPr>
+          <a:xfrm>
+            <a:off x="4629150" y="3806190"/>
+            <a:ext cx="240030" cy="274320"/>
+          </a:xfrm>
+          <a:prstGeom prst="rect">
+            <a:avLst/>
+          </a:prstGeom>
+          <a:noFill/>
+          <a:ln/>
+        </p:spPr>
+        <p:txBody>
+          <a:bodyPr wrap="square" rtlCol="0" anchor="ctr"/>
+          <a:lstStyle/>
+          <a:p>
+            <a:r>
+              <a:rPr lang="en-US" sz="1050" dirty="0">
+                <a:solidFill>
+                  <a:srgbClr val="0284C7"/>
+                </a:solidFill>
+              </a:rPr>
+              <a:t>❄</a:t>
+            </a:r>
+            <a:endParaRPr lang="en-US" sz="1050" dirty="0"/>
+          </a:p>
+        </p:txBody>
+      </p:sp>
+      <p:sp>
+        <p:nvSpPr>
+          <p:cNvPr id="57" name="Text 55"/>
+          <p:cNvSpPr/>
+          <p:nvPr/>
+        </p:nvSpPr>
+        <p:spPr>
+          <a:xfrm>
+            <a:off x="4903470" y="3806190"/>
+            <a:ext cx="3840480" cy="480060"/>
+          </a:xfrm>
+          <a:prstGeom prst="rect">
+            <a:avLst/>
+          </a:prstGeom>
+          <a:noFill/>
+          <a:ln/>
+        </p:spPr>
+        <p:txBody>
+          <a:bodyPr wrap="square" rtlCol="0" anchor="t"/>
+          <a:lstStyle/>
+          <a:p>
+            <a:r>
+              <a:rPr lang="en-US" sz="750" b="1" dirty="0">
+                <a:solidFill>
+                  <a:srgbClr val="0F172A"/>
+                </a:solidFill>
+              </a:rPr>
+              <a:t>Snowflake medallion </a:t>
+            </a:r>
+            <a:r>
+              <a:rPr lang="en-US" sz="750" dirty="0">
+                <a:solidFill>
+                  <a:srgbClr val="475569"/>
+                </a:solidFill>
+              </a:rPr>
+              <a:t>— bronze → silver → gold ensures data gets cleaner and more valuable at each step</a:t>
+            </a:r>
+            <a:endParaRPr lang="en-US" sz="750" dirty="0"/>
+          </a:p>
+        </p:txBody>
+      </p:sp>
+      <p:sp>
+        <p:nvSpPr>
+          <p:cNvPr id="58" name="Text 56"/>
+          <p:cNvSpPr/>
+          <p:nvPr/>
+        </p:nvSpPr>
+        <p:spPr>
+          <a:xfrm>
+            <a:off x="411480" y="4354830"/>
+            <a:ext cx="240030" cy="274320"/>
+          </a:xfrm>
+          <a:prstGeom prst="rect">
+            <a:avLst/>
+          </a:prstGeom>
+          <a:noFill/>
+          <a:ln/>
+        </p:spPr>
+        <p:txBody>
+          <a:bodyPr wrap="square" rtlCol="0" anchor="ctr"/>
+          <a:lstStyle/>
+          <a:p>
+            <a:r>
+              <a:rPr lang="en-US" sz="1050" dirty="0">
+                <a:solidFill>
+                  <a:srgbClr val="1D4ED8"/>
+                </a:solidFill>
+              </a:rPr>
+              <a:t>💾</a:t>
+            </a:r>
+            <a:endParaRPr lang="en-US" sz="1050" dirty="0"/>
+          </a:p>
+        </p:txBody>
+      </p:sp>
+      <p:sp>
+        <p:nvSpPr>
+          <p:cNvPr id="59" name="Text 57"/>
+          <p:cNvSpPr/>
+          <p:nvPr/>
+        </p:nvSpPr>
+        <p:spPr>
+          <a:xfrm>
+            <a:off x="685800" y="4354830"/>
+            <a:ext cx="3840480" cy="480060"/>
+          </a:xfrm>
+          <a:prstGeom prst="rect">
+            <a:avLst/>
+          </a:prstGeom>
+          <a:noFill/>
+          <a:ln/>
+        </p:spPr>
+        <p:txBody>
+          <a:bodyPr wrap="square" rtlCol="0" anchor="t"/>
+          <a:lstStyle/>
+          <a:p>
+            <a:r>
+              <a:rPr lang="en-US" sz="750" b="1" dirty="0">
+                <a:solidFill>
+                  <a:srgbClr val="0F172A"/>
+                </a:solidFill>
+              </a:rPr>
+              <a:t>ADLS Gen2 </a:t>
+            </a:r>
+            <a:r>
+              <a:rPr lang="en-US" sz="750" dirty="0">
+                <a:solidFill>
+                  <a:srgbClr val="475569"/>
+                </a:solidFill>
+              </a:rPr>
+              <a:t>— raw data preserved in bronze layer; safe to reprocess if anything goes wrong downstream</a:t>
+            </a:r>
+            <a:endParaRPr lang="en-US" sz="750" dirty="0"/>
+          </a:p>
+        </p:txBody>
+      </p:sp>
+      <p:sp>
+        <p:nvSpPr>
+          <p:cNvPr id="60" name="Text 58"/>
+          <p:cNvSpPr/>
+          <p:nvPr/>
+        </p:nvSpPr>
+        <p:spPr>
+          <a:xfrm>
+            <a:off x="4629150" y="4354830"/>
+            <a:ext cx="240030" cy="274320"/>
+          </a:xfrm>
+          <a:prstGeom prst="rect">
+            <a:avLst/>
+          </a:prstGeom>
+          <a:noFill/>
+          <a:ln/>
+        </p:spPr>
+        <p:txBody>
+          <a:bodyPr wrap="square" rtlCol="0" anchor="ctr"/>
+          <a:lstStyle/>
+          <a:p>
+            <a:r>
+              <a:rPr lang="en-US" sz="1050" dirty="0">
+                <a:solidFill>
+                  <a:srgbClr val="B45309"/>
+                </a:solidFill>
+              </a:rPr>
+              <a:t>🔧</a:t>
+            </a:r>
+            <a:endParaRPr lang="en-US" sz="1050" dirty="0"/>
+          </a:p>
+        </p:txBody>
+      </p:sp>
+      <p:sp>
+        <p:nvSpPr>
+          <p:cNvPr id="61" name="Text 59"/>
+          <p:cNvSpPr/>
+          <p:nvPr/>
+        </p:nvSpPr>
+        <p:spPr>
+          <a:xfrm>
+            <a:off x="4903470" y="4354830"/>
+            <a:ext cx="3840480" cy="480060"/>
+          </a:xfrm>
+          <a:prstGeom prst="rect">
+            <a:avLst/>
+          </a:prstGeom>
+          <a:noFill/>
+          <a:ln/>
+        </p:spPr>
+        <p:txBody>
+          <a:bodyPr wrap="square" rtlCol="0" anchor="t"/>
+          <a:lstStyle/>
+          <a:p>
+            <a:r>
+              <a:rPr lang="en-US" sz="750" b="1" dirty="0">
+                <a:solidFill>
+                  <a:srgbClr val="0F172A"/>
+                </a:solidFill>
+              </a:rPr>
+              <a:t>dbt tests </a:t>
+            </a:r>
+            <a:r>
+              <a:rPr lang="en-US" sz="750" dirty="0">
+                <a:solidFill>
+                  <a:srgbClr val="475569"/>
+                </a:solidFill>
+              </a:rPr>
+              <a:t>— not_null and unique constraints catch bad data before it ever reaches Power BI</a:t>
+            </a:r>
+            <a:endParaRPr lang="en-US" sz="750" dirty="0"/>
           </a:p>
         </p:txBody>
       </p:sp>
@@ -18393,8 +18393,8 @@
             <a:chExt cx="4077993" cy="4016737"/>
           </a:xfrm>
         </p:grpSpPr>
-        <mc:AlternateContent xmlns:mc="http://schemas.openxmlformats.org/markup-compatibility/2006">
-          <mc:Choice xmlns:p14="http://schemas.microsoft.com/office/powerpoint/2010/main" Requires="p14">
+        <mc:AlternateContent xmlns:mc="http://schemas.openxmlformats.org/markup-compatibility/2006" xmlns:p14="http://schemas.microsoft.com/office/powerpoint/2010/main">
+          <mc:Choice Requires="p14">
             <p:contentPart p14:bwMode="auto" r:id="rId3">
               <p14:nvContentPartPr>
                 <p14:cNvPr id="5" name="Ink 4">
@@ -18413,7 +18413,7 @@
               </p14:xfrm>
             </p:contentPart>
           </mc:Choice>
-          <mc:Fallback>
+          <mc:Fallback xmlns="">
             <p:pic>
               <p:nvPicPr>
                 <p:cNvPr id="5" name="Ink 4">
@@ -18444,8 +18444,8 @@
             </p:pic>
           </mc:Fallback>
         </mc:AlternateContent>
-        <mc:AlternateContent xmlns:mc="http://schemas.openxmlformats.org/markup-compatibility/2006">
-          <mc:Choice xmlns:p14="http://schemas.microsoft.com/office/powerpoint/2010/main" Requires="p14">
+        <mc:AlternateContent xmlns:mc="http://schemas.openxmlformats.org/markup-compatibility/2006" xmlns:p14="http://schemas.microsoft.com/office/powerpoint/2010/main">
+          <mc:Choice Requires="p14">
             <p:contentPart p14:bwMode="auto" r:id="rId5">
               <p14:nvContentPartPr>
                 <p14:cNvPr id="6" name="Ink 5">
@@ -18464,7 +18464,7 @@
               </p14:xfrm>
             </p:contentPart>
           </mc:Choice>
-          <mc:Fallback>
+          <mc:Fallback xmlns="">
             <p:pic>
               <p:nvPicPr>
                 <p:cNvPr id="6" name="Ink 5">
@@ -18495,8 +18495,8 @@
             </p:pic>
           </mc:Fallback>
         </mc:AlternateContent>
-        <mc:AlternateContent xmlns:mc="http://schemas.openxmlformats.org/markup-compatibility/2006">
-          <mc:Choice xmlns:p14="http://schemas.microsoft.com/office/powerpoint/2010/main" Requires="p14">
+        <mc:AlternateContent xmlns:mc="http://schemas.openxmlformats.org/markup-compatibility/2006" xmlns:p14="http://schemas.microsoft.com/office/powerpoint/2010/main">
+          <mc:Choice Requires="p14">
             <p:contentPart p14:bwMode="auto" r:id="rId7">
               <p14:nvContentPartPr>
                 <p14:cNvPr id="8" name="Ink 7">
@@ -18515,7 +18515,7 @@
               </p14:xfrm>
             </p:contentPart>
           </mc:Choice>
-          <mc:Fallback>
+          <mc:Fallback xmlns="">
             <p:pic>
               <p:nvPicPr>
                 <p:cNvPr id="8" name="Ink 7">
@@ -18667,8 +18667,8 @@
             <a:chExt cx="2843640" cy="139320"/>
           </a:xfrm>
         </p:grpSpPr>
-        <mc:AlternateContent xmlns:mc="http://schemas.openxmlformats.org/markup-compatibility/2006">
-          <mc:Choice xmlns:p14="http://schemas.microsoft.com/office/powerpoint/2010/main" Requires="p14">
+        <mc:AlternateContent xmlns:mc="http://schemas.openxmlformats.org/markup-compatibility/2006" xmlns:p14="http://schemas.microsoft.com/office/powerpoint/2010/main">
+          <mc:Choice Requires="p14">
             <p:contentPart p14:bwMode="auto" r:id="rId3">
               <p14:nvContentPartPr>
                 <p14:cNvPr id="8" name="Ink 7">
@@ -18687,7 +18687,7 @@
               </p14:xfrm>
             </p:contentPart>
           </mc:Choice>
-          <mc:Fallback>
+          <mc:Fallback xmlns="">
             <p:pic>
               <p:nvPicPr>
                 <p:cNvPr id="8" name="Ink 7">
@@ -18718,8 +18718,8 @@
             </p:pic>
           </mc:Fallback>
         </mc:AlternateContent>
-        <mc:AlternateContent xmlns:mc="http://schemas.openxmlformats.org/markup-compatibility/2006">
-          <mc:Choice xmlns:p14="http://schemas.microsoft.com/office/powerpoint/2010/main" Requires="p14">
+        <mc:AlternateContent xmlns:mc="http://schemas.openxmlformats.org/markup-compatibility/2006" xmlns:p14="http://schemas.microsoft.com/office/powerpoint/2010/main">
+          <mc:Choice Requires="p14">
             <p:contentPart p14:bwMode="auto" r:id="rId5">
               <p14:nvContentPartPr>
                 <p14:cNvPr id="9" name="Ink 8">
@@ -18738,7 +18738,7 @@
               </p14:xfrm>
             </p:contentPart>
           </mc:Choice>
-          <mc:Fallback>
+          <mc:Fallback xmlns="">
             <p:pic>
               <p:nvPicPr>
                 <p:cNvPr id="9" name="Ink 8">
